--- a/presentations/05_Seminar_Webinar_Protect_Foreign_Investors_EN.pptx
+++ b/presentations/05_Seminar_Webinar_Protect_Foreign_Investors_EN.pptx
@@ -124,34 +124,34 @@
   <p:extLst>
     <p:ext uri="{521415D9-36F7-43E2-AB2F-B90AF26B5E84}">
       <p14:sectionLst xmlns:p14="http://schemas.microsoft.com/office/powerpoint/2010/main">
-        <p14:section name="Introduction" id="{b022cd0d-7990-b5a3-d8bd-4c3888a739de}">
+        <p14:section name="Introduction" id="{3bcbc316-c462-2bed-d9a8-db453935499e}">
           <p14:sldIdLst>
             <p14:sldId id="256"/>
             <p14:sldId id="257"/>
           </p14:sldIdLst>
         </p14:section>
-        <p14:section name="The reality" id="{f0069033-1fb3-d6a3-6247-f0e11bccd7a7}">
+        <p14:section name="The reality" id="{1487cb47-1dad-4f60-c15e-ad2a60c6f825}">
           <p14:sldIdLst>
             <p14:sldId id="258"/>
             <p14:sldId id="259"/>
             <p14:sldId id="260"/>
           </p14:sldIdLst>
         </p14:section>
-        <p14:section name="Legal framework" id="{b3a3d870-5a07-c8c5-6200-d90e73b48a66}">
+        <p14:section name="Legal framework" id="{4d00e733-468c-b242-bab1-dc2bc2dcc345}">
           <p14:sldIdLst>
             <p14:sldId id="261"/>
             <p14:sldId id="262"/>
             <p14:sldId id="263"/>
           </p14:sldIdLst>
         </p14:section>
-        <p14:section name="The tools" id="{a2e195c0-c0f2-63b7-e201-6d5917c69fd7}">
+        <p14:section name="The tools" id="{62e0f80b-7026-a98a-fd65-c68aeeb9dbce}">
           <p14:sldIdLst>
             <p14:sldId id="264"/>
             <p14:sldId id="265"/>
             <p14:sldId id="266"/>
           </p14:sldIdLst>
         </p14:section>
-        <p14:section name="Scenarios" id="{95b86519-c2c4-ceec-771c-58ea61e29ac3}">
+        <p14:section name="Scenarios" id="{432e7b97-9b37-47bb-78df-57f5e6f9cb74}">
           <p14:sldIdLst>
             <p14:sldId id="267"/>
             <p14:sldId id="268"/>
@@ -2140,7 +2140,7 @@
     <p:bg>
       <p:bgPr>
         <a:solidFill>
-          <a:srgbClr val="0B0B0B"/>
+          <a:srgbClr val="0E2238"/>
         </a:solidFill>
       </p:bgPr>
     </p:bg>
@@ -2158,106 +2158,30 @@
           <a:chExt cx="0" cy="0"/>
         </a:xfrm>
       </p:grpSpPr>
-      <p:sp>
-        <p:nvSpPr>
-          <p:cNvPr id="2" name="Shape 0"/>
-          <p:cNvSpPr/>
-          <p:nvPr/>
-        </p:nvSpPr>
-        <p:spPr>
-          <a:xfrm>
-            <a:off x="365760" y="4626864"/>
-            <a:ext cx="384048" cy="384048"/>
-          </a:xfrm>
-          <a:prstGeom prst="rect">
-            <a:avLst/>
-          </a:prstGeom>
-          <a:solidFill>
-            <a:srgbClr val="0B0B0B"/>
-          </a:solidFill>
-          <a:ln w="9525">
-            <a:solidFill>
-              <a:srgbClr val="B08D57"/>
-            </a:solidFill>
-            <a:prstDash val="solid"/>
-          </a:ln>
-        </p:spPr>
-      </p:sp>
-      <p:sp>
-        <p:nvSpPr>
-          <p:cNvPr id="3" name="Text 1"/>
-          <p:cNvSpPr/>
-          <p:nvPr/>
-        </p:nvSpPr>
-        <p:spPr>
-          <a:xfrm>
-            <a:off x="365760" y="4626864"/>
-            <a:ext cx="384048" cy="384048"/>
-          </a:xfrm>
-          <a:prstGeom prst="rect">
-            <a:avLst/>
-          </a:prstGeom>
-          <a:noFill/>
-          <a:ln/>
-        </p:spPr>
-        <p:txBody>
-          <a:bodyPr wrap="square" lIns="0" tIns="0" rIns="0" bIns="0" rtlCol="0" anchor="ctr"/>
-          <a:lstStyle/>
-          <a:p>
-            <a:pPr algn="ctr" indent="0" marL="0">
-              <a:buNone/>
-            </a:pPr>
-            <a:r>
-              <a:rPr lang="en-US" sz="1000" b="1" dirty="0">
-                <a:solidFill>
-                  <a:srgbClr val="B08D57"/>
-                </a:solidFill>
-                <a:latin typeface="Cambria" pitchFamily="34" charset="0"/>
-                <a:ea typeface="Cambria" pitchFamily="34" charset="-122"/>
-                <a:cs typeface="Cambria" pitchFamily="34" charset="-120"/>
-              </a:rPr>
-              <a:t>RK</a:t>
-            </a:r>
-            <a:endParaRPr lang="en-US" sz="1000" dirty="0"/>
-          </a:p>
-        </p:txBody>
-      </p:sp>
-      <p:sp>
-        <p:nvSpPr>
-          <p:cNvPr id="4" name="Text 2"/>
-          <p:cNvSpPr/>
-          <p:nvPr/>
-        </p:nvSpPr>
-        <p:spPr>
-          <a:xfrm>
-            <a:off x="822960" y="4626864"/>
-            <a:ext cx="5120640" cy="384048"/>
-          </a:xfrm>
-          <a:prstGeom prst="rect">
-            <a:avLst/>
-          </a:prstGeom>
-          <a:noFill/>
-          <a:ln/>
-        </p:spPr>
-        <p:txBody>
-          <a:bodyPr wrap="square" lIns="0" tIns="0" rIns="0" bIns="0" rtlCol="0" anchor="ctr"/>
-          <a:lstStyle/>
-          <a:p>
-            <a:pPr algn="l" indent="0" marL="0">
-              <a:buNone/>
-            </a:pPr>
-            <a:r>
-              <a:rPr lang="en-US" sz="900" dirty="0">
-                <a:solidFill>
-                  <a:srgbClr val="D8C39A"/>
-                </a:solidFill>
-              </a:rPr>
-              <a:t>Rashid Alkaitoob Advocates &amp; Legal Consultants</a:t>
-            </a:r>
-            <a:endParaRPr lang="en-US" sz="900" dirty="0"/>
-          </a:p>
-        </p:txBody>
-      </p:sp>
+      <p:pic>
+        <p:nvPicPr>
+          <p:cNvPr id="2" name="Image 0" descr="/tmp/claude-0/-home-user-aa/b81485da-2e22-5d10-878f-01904e6d5dc6/scratchpad/rk/logo_dark.png">    </p:cNvPr>
+          <p:cNvPicPr>
+            <a:picLocks noChangeAspect="1"/>
+          </p:cNvPicPr>
+          <p:nvPr/>
+        </p:nvPicPr>
+        <p:blipFill>
+          <a:blip r:embed="rId1"/>
+          <a:stretch>
+            <a:fillRect/>
+          </a:stretch>
+        </p:blipFill>
+        <p:spPr>
+          <a:xfrm>
+            <a:off x="365760" y="4681728"/>
+            <a:ext cx="1675417" cy="274320"/>
+          </a:xfrm>
+          <a:prstGeom prst="rect">
+            <a:avLst/>
+          </a:prstGeom>
+        </p:spPr>
+      </p:pic>
       <p:sp>
         <p:nvSpPr>
           <p:cNvPr id="25" name="Slide Number Placeholder 0"/>
@@ -2288,7 +2212,7 @@
             <a:lvl1pPr>
               <a:defRPr sz="900">
                 <a:solidFill>
-                  <a:srgbClr val="D8C39A"/>
+                  <a:srgbClr val="D9B38C"/>
                 </a:solidFill>
               </a:defRPr>
             </a:lvl1pPr>
@@ -2335,118 +2259,42 @@
           <a:chExt cx="0" cy="0"/>
         </a:xfrm>
       </p:grpSpPr>
-      <p:sp>
-        <p:nvSpPr>
-          <p:cNvPr id="2" name="Shape 0"/>
-          <p:cNvSpPr/>
-          <p:nvPr/>
-        </p:nvSpPr>
-        <p:spPr>
-          <a:xfrm>
-            <a:off x="365760" y="4626864"/>
-            <a:ext cx="384048" cy="384048"/>
-          </a:xfrm>
-          <a:prstGeom prst="rect">
-            <a:avLst/>
-          </a:prstGeom>
-          <a:solidFill>
-            <a:srgbClr val="FFFFFF"/>
-          </a:solidFill>
-          <a:ln w="9525">
-            <a:solidFill>
-              <a:srgbClr val="B08D57"/>
-            </a:solidFill>
-            <a:prstDash val="solid"/>
-          </a:ln>
-        </p:spPr>
-      </p:sp>
-      <p:sp>
-        <p:nvSpPr>
-          <p:cNvPr id="3" name="Text 1"/>
-          <p:cNvSpPr/>
-          <p:nvPr/>
-        </p:nvSpPr>
-        <p:spPr>
-          <a:xfrm>
-            <a:off x="365760" y="4626864"/>
-            <a:ext cx="384048" cy="384048"/>
-          </a:xfrm>
-          <a:prstGeom prst="rect">
-            <a:avLst/>
-          </a:prstGeom>
-          <a:noFill/>
-          <a:ln/>
-        </p:spPr>
-        <p:txBody>
-          <a:bodyPr wrap="square" lIns="0" tIns="0" rIns="0" bIns="0" rtlCol="0" anchor="ctr"/>
-          <a:lstStyle/>
-          <a:p>
-            <a:pPr algn="ctr" indent="0" marL="0">
-              <a:buNone/>
-            </a:pPr>
-            <a:r>
-              <a:rPr lang="en-US" sz="1000" b="1" dirty="0">
-                <a:solidFill>
-                  <a:srgbClr val="B08D57"/>
-                </a:solidFill>
-                <a:latin typeface="Cambria" pitchFamily="34" charset="0"/>
-                <a:ea typeface="Cambria" pitchFamily="34" charset="-122"/>
-                <a:cs typeface="Cambria" pitchFamily="34" charset="-120"/>
-              </a:rPr>
-              <a:t>RK</a:t>
-            </a:r>
-            <a:endParaRPr lang="en-US" sz="1000" dirty="0"/>
-          </a:p>
-        </p:txBody>
-      </p:sp>
-      <p:sp>
-        <p:nvSpPr>
-          <p:cNvPr id="4" name="Text 2"/>
-          <p:cNvSpPr/>
-          <p:nvPr/>
-        </p:nvSpPr>
-        <p:spPr>
-          <a:xfrm>
-            <a:off x="822960" y="4626864"/>
-            <a:ext cx="5120640" cy="384048"/>
-          </a:xfrm>
-          <a:prstGeom prst="rect">
-            <a:avLst/>
-          </a:prstGeom>
-          <a:noFill/>
-          <a:ln/>
-        </p:spPr>
-        <p:txBody>
-          <a:bodyPr wrap="square" lIns="0" tIns="0" rIns="0" bIns="0" rtlCol="0" anchor="ctr"/>
-          <a:lstStyle/>
-          <a:p>
-            <a:pPr algn="l" indent="0" marL="0">
-              <a:buNone/>
-            </a:pPr>
-            <a:r>
-              <a:rPr lang="en-US" sz="900" dirty="0">
-                <a:solidFill>
-                  <a:srgbClr val="6B6F76"/>
-                </a:solidFill>
-              </a:rPr>
-              <a:t>Rashid Alkaitoob Advocates &amp; Legal Consultants</a:t>
-            </a:r>
-            <a:endParaRPr lang="en-US" sz="900" dirty="0"/>
-          </a:p>
-        </p:txBody>
-      </p:sp>
-      <p:sp>
-        <p:nvSpPr>
-          <p:cNvPr id="5" name="Text 3"/>
+      <p:pic>
+        <p:nvPicPr>
+          <p:cNvPr id="2" name="Image 0" descr="/tmp/claude-0/-home-user-aa/b81485da-2e22-5d10-878f-01904e6d5dc6/scratchpad/rk/logo_light.png">    </p:cNvPr>
+          <p:cNvPicPr>
+            <a:picLocks noChangeAspect="1"/>
+          </p:cNvPicPr>
+          <p:nvPr/>
+        </p:nvPicPr>
+        <p:blipFill>
+          <a:blip r:embed="rId1"/>
+          <a:stretch>
+            <a:fillRect/>
+          </a:stretch>
+        </p:blipFill>
+        <p:spPr>
+          <a:xfrm>
+            <a:off x="365760" y="4681728"/>
+            <a:ext cx="1675417" cy="274320"/>
+          </a:xfrm>
+          <a:prstGeom prst="rect">
+            <a:avLst/>
+          </a:prstGeom>
+        </p:spPr>
+      </p:pic>
+      <p:sp>
+        <p:nvSpPr>
+          <p:cNvPr id="3" name="Text 0"/>
           <p:cNvSpPr/>
           <p:nvPr>
-            <p:ph idx="103" type="title" hasCustomPrompt="1"/>
+            <p:ph idx="101" type="title" hasCustomPrompt="1"/>
           </p:nvPr>
         </p:nvSpPr>
         <p:spPr>
           <a:xfrm>
-            <a:off x="457200" y="347472"/>
-            <a:ext cx="8229600" cy="685800"/>
+            <a:off x="457200" y="420624"/>
+            <a:ext cx="8229600" cy="731520"/>
           </a:xfrm>
           <a:prstGeom prst="rect">
             <a:avLst/>
@@ -2461,7 +2309,7 @@
               <a:buNone/>
               <a:defRPr lang="en-US" sz="2600" b="1" dirty="0">
                 <a:solidFill>
-                  <a:srgbClr val="0B0B0B"/>
+                  <a:srgbClr val="0E2238"/>
                 </a:solidFill>
               </a:defRPr>
             </a:lvl1pPr>
@@ -2504,7 +2352,7 @@
             <a:lvl1pPr>
               <a:defRPr sz="900">
                 <a:solidFill>
-                  <a:srgbClr val="6B6F76"/>
+                  <a:srgbClr val="6E7B88"/>
                 </a:solidFill>
               </a:defRPr>
             </a:lvl1pPr>
@@ -2533,7 +2381,7 @@
     <p:bg>
       <p:bgPr>
         <a:solidFill>
-          <a:srgbClr val="0B0B0B"/>
+          <a:srgbClr val="0E2238"/>
         </a:solidFill>
       </p:bgPr>
     </p:bg>
@@ -2606,7 +2454,7 @@
             <a:lvl1pPr>
               <a:defRPr sz="900">
                 <a:solidFill>
-                  <a:srgbClr val="D8C39A"/>
+                  <a:srgbClr val="D9B38C"/>
                 </a:solidFill>
               </a:defRPr>
             </a:lvl1pPr>
@@ -2917,47 +2765,46 @@
           </a:prstGeom>
           <a:ln w="9525">
             <a:solidFill>
-              <a:srgbClr val="B08D57"/>
+              <a:srgbClr val="B5723B"/>
             </a:solidFill>
             <a:prstDash val="solid"/>
           </a:ln>
         </p:spPr>
       </p:sp>
-      <p:sp>
-        <p:nvSpPr>
-          <p:cNvPr id="3" name="Shape 1"/>
-          <p:cNvSpPr/>
-          <p:nvPr/>
-        </p:nvSpPr>
+      <p:pic>
+        <p:nvPicPr>
+          <p:cNvPr id="3" name="Image 0" descr="/tmp/claude-0/-home-user-aa/b81485da-2e22-5d10-878f-01904e6d5dc6/scratchpad/rk/logo_dark.png">    </p:cNvPr>
+          <p:cNvPicPr>
+            <a:picLocks noChangeAspect="1"/>
+          </p:cNvPicPr>
+          <p:nvPr/>
+        </p:nvPicPr>
+        <p:blipFill>
+          <a:blip r:embed="rId1"/>
+          <a:stretch>
+            <a:fillRect/>
+          </a:stretch>
+        </p:blipFill>
         <p:spPr>
           <a:xfrm>
             <a:off x="868680" y="868680"/>
-            <a:ext cx="822960" cy="822960"/>
-          </a:xfrm>
-          <a:prstGeom prst="rect">
-            <a:avLst/>
-          </a:prstGeom>
-          <a:solidFill>
-            <a:srgbClr val="0B0B0B"/>
-          </a:solidFill>
-          <a:ln w="12700">
-            <a:solidFill>
-              <a:srgbClr val="B08D57"/>
-            </a:solidFill>
-            <a:prstDash val="solid"/>
-          </a:ln>
-        </p:spPr>
-      </p:sp>
-      <p:sp>
-        <p:nvSpPr>
-          <p:cNvPr id="4" name="Text 2"/>
-          <p:cNvSpPr txBox="1"/>
-          <p:nvPr/>
-        </p:nvSpPr>
-        <p:spPr>
-          <a:xfrm>
-            <a:off x="868680" y="868680"/>
-            <a:ext cx="822960" cy="822960"/>
+            <a:ext cx="4021000" cy="658368"/>
+          </a:xfrm>
+          <a:prstGeom prst="rect">
+            <a:avLst/>
+          </a:prstGeom>
+        </p:spPr>
+      </p:pic>
+      <p:sp>
+        <p:nvSpPr>
+          <p:cNvPr id="4" name="Text 1"/>
+          <p:cNvSpPr txBox="1"/>
+          <p:nvPr/>
+        </p:nvSpPr>
+        <p:spPr>
+          <a:xfrm>
+            <a:off x="868680" y="1965960"/>
+            <a:ext cx="7406640" cy="1371600"/>
           </a:xfrm>
           <a:prstGeom prst="rect">
             <a:avLst/>
@@ -2969,93 +2816,18 @@
           <a:bodyPr wrap="square" lIns="0" tIns="0" rIns="0" bIns="0" rtlCol="0" anchor="ctr"/>
           <a:lstStyle/>
           <a:p>
-            <a:pPr algn="ctr" indent="0" marL="0">
-              <a:buNone/>
-            </a:pPr>
-            <a:r>
-              <a:rPr lang="en-US" sz="2400" b="1" dirty="0">
-                <a:solidFill>
-                  <a:schemeClr val="accent1"/>
+            <a:pPr algn="l" indent="0" marL="0">
+              <a:buNone/>
+            </a:pPr>
+            <a:r>
+              <a:rPr lang="en-US" altLang="en-US" sz="3400" b="1" dirty="0">
+                <a:solidFill>
+                  <a:schemeClr val="bg1"/>
                 </a:solidFill>
                 <a:latin typeface="Cambria" pitchFamily="34" charset="0"/>
                 <a:ea typeface="Cambria" pitchFamily="34" charset="-122"/>
                 <a:cs typeface="Cambria" pitchFamily="34" charset="-120"/>
               </a:rPr>
-              <a:t>RK</a:t>
-            </a:r>
-            <a:endParaRPr lang="en-US" sz="2400" dirty="0"/>
-          </a:p>
-        </p:txBody>
-      </p:sp>
-      <p:sp>
-        <p:nvSpPr>
-          <p:cNvPr id="5" name="Text 3"/>
-          <p:cNvSpPr txBox="1"/>
-          <p:nvPr/>
-        </p:nvSpPr>
-        <p:spPr>
-          <a:xfrm>
-            <a:off x="1874520" y="868680"/>
-            <a:ext cx="5943600" cy="822960"/>
-          </a:xfrm>
-          <a:prstGeom prst="rect">
-            <a:avLst/>
-          </a:prstGeom>
-          <a:noFill/>
-          <a:ln/>
-        </p:spPr>
-        <p:txBody>
-          <a:bodyPr wrap="square" lIns="0" tIns="0" rIns="0" bIns="0" rtlCol="0" anchor="ctr"/>
-          <a:lstStyle/>
-          <a:p>
-            <a:pPr algn="l" indent="0" marL="0">
-              <a:buNone/>
-            </a:pPr>
-            <a:r>
-              <a:rPr lang="en-US" altLang="en-US" sz="1200" dirty="0">
-                <a:solidFill>
-                  <a:schemeClr val="accent2"/>
-                </a:solidFill>
-              </a:rPr>
-              <a:t>Rashid Alkaitoob Advocates &amp; Legal Consultants</a:t>
-            </a:r>
-            <a:endParaRPr lang="en-US" sz="1200" dirty="0"/>
-          </a:p>
-        </p:txBody>
-      </p:sp>
-      <p:sp>
-        <p:nvSpPr>
-          <p:cNvPr id="6" name="Text 4"/>
-          <p:cNvSpPr txBox="1"/>
-          <p:nvPr/>
-        </p:nvSpPr>
-        <p:spPr>
-          <a:xfrm>
-            <a:off x="868680" y="1965960"/>
-            <a:ext cx="7406640" cy="1371600"/>
-          </a:xfrm>
-          <a:prstGeom prst="rect">
-            <a:avLst/>
-          </a:prstGeom>
-          <a:noFill/>
-          <a:ln/>
-        </p:spPr>
-        <p:txBody>
-          <a:bodyPr wrap="square" lIns="0" tIns="0" rIns="0" bIns="0" rtlCol="0" anchor="ctr"/>
-          <a:lstStyle/>
-          <a:p>
-            <a:pPr algn="l" indent="0" marL="0">
-              <a:buNone/>
-            </a:pPr>
-            <a:r>
-              <a:rPr lang="en-US" altLang="en-US" sz="3400" b="1" dirty="0">
-                <a:solidFill>
-                  <a:schemeClr val="bg1"/>
-                </a:solidFill>
-                <a:latin typeface="Cambria" pitchFamily="34" charset="0"/>
-                <a:ea typeface="Cambria" pitchFamily="34" charset="-122"/>
-                <a:cs typeface="Cambria" pitchFamily="34" charset="-120"/>
-              </a:rPr>
               <a:t>How to Protect Foreign Investors in the UAE</a:t>
             </a:r>
             <a:endParaRPr lang="en-US" sz="3400" dirty="0"/>
@@ -3064,7 +2836,7 @@
       </p:sp>
       <p:sp>
         <p:nvSpPr>
-          <p:cNvPr id="7" name="Text 5"/>
+          <p:cNvPr id="5" name="Text 2"/>
           <p:cNvSpPr txBox="1"/>
           <p:nvPr/>
         </p:nvSpPr>
@@ -3100,7 +2872,7 @@
       </p:sp>
       <p:sp>
         <p:nvSpPr>
-          <p:cNvPr id="8" name="Text 6"/>
+          <p:cNvPr id="6" name="Text 3"/>
           <p:cNvSpPr txBox="1"/>
           <p:nvPr/>
         </p:nvSpPr>
@@ -3164,7 +2936,7 @@
             <a:lvl1pPr>
               <a:defRPr sz="900">
                 <a:solidFill>
-                  <a:srgbClr val="D8C39A"/>
+                  <a:srgbClr val="D9B38C"/>
                 </a:solidFill>
               </a:defRPr>
             </a:lvl1pPr>
@@ -3206,35 +2978,36 @@
       </p:grpSpPr>
       <p:sp>
         <p:nvSpPr>
-          <p:cNvPr id="2" name="Text 3"/>
-          <p:cNvSpPr/>
-          <p:nvPr>
-            <p:ph idx="103" type="title" hasCustomPrompt="1"/>
-          </p:nvPr>
-        </p:nvSpPr>
-        <p:spPr>
-          <a:xfrm>
-            <a:off x="457200" y="347472"/>
-            <a:ext cx="8229600" cy="685800"/>
-          </a:xfrm>
-          <a:prstGeom prst="rect">
-            <a:avLst/>
-          </a:prstGeom>
-          <a:noFill/>
-          <a:ln/>
-        </p:spPr>
-        <p:txBody>
-          <a:bodyPr wrap="square" lIns="0" tIns="0" rIns="0" bIns="0" rtlCol="0" anchor="ctr"/>
-          <a:lstStyle/>
-          <a:p>
-            <a:pPr algn="l" indent="0" marL="0">
-              <a:buNone/>
-            </a:pPr>
-            <a:r>
-              <a:rPr lang="en-US" sz="2600" b="1" dirty="0">
-                <a:solidFill>
-                  <a:srgbClr val="0B0B0B"/>
-                </a:solidFill>
+          <p:cNvPr id="2" name="Text 0"/>
+          <p:cNvSpPr txBox="1"/>
+          <p:nvPr/>
+        </p:nvSpPr>
+        <p:spPr>
+          <a:xfrm>
+            <a:off x="457200" y="402336"/>
+            <a:ext cx="8229600" cy="749808"/>
+          </a:xfrm>
+          <a:prstGeom prst="rect">
+            <a:avLst/>
+          </a:prstGeom>
+          <a:noFill/>
+          <a:ln/>
+        </p:spPr>
+        <p:txBody>
+          <a:bodyPr wrap="square" lIns="0" tIns="0" rIns="0" bIns="0" rtlCol="0" anchor="t"/>
+          <a:lstStyle/>
+          <a:p>
+            <a:pPr algn="l" indent="0" marL="0">
+              <a:buNone/>
+            </a:pPr>
+            <a:r>
+              <a:rPr lang="en-US" altLang="en-US" sz="2600" b="1" dirty="0">
+                <a:solidFill>
+                  <a:schemeClr val="tx1"/>
+                </a:solidFill>
+                <a:latin typeface="Cambria" pitchFamily="34" charset="0"/>
+                <a:ea typeface="Cambria" pitchFamily="34" charset="-122"/>
+                <a:cs typeface="Cambria" pitchFamily="34" charset="-120"/>
               </a:rPr>
               <a:t>The protection tools available</a:t>
             </a:r>
@@ -3293,11 +3066,11 @@
             <a:avLst/>
           </a:prstGeom>
           <a:solidFill>
-            <a:srgbClr val="F4F1EA"/>
+            <a:srgbClr val="F4F1EB"/>
           </a:solidFill>
           <a:ln w="12700">
             <a:solidFill>
-              <a:srgbClr val="F4F1EA"/>
+              <a:srgbClr val="F4F1EB"/>
             </a:solidFill>
             <a:prstDash val="solid"/>
           </a:ln>
@@ -3398,11 +3171,11 @@
             <a:avLst/>
           </a:prstGeom>
           <a:solidFill>
-            <a:srgbClr val="F4F1EA"/>
+            <a:srgbClr val="F4F1EB"/>
           </a:solidFill>
           <a:ln w="12700">
             <a:solidFill>
-              <a:srgbClr val="F4F1EA"/>
+              <a:srgbClr val="F4F1EB"/>
             </a:solidFill>
             <a:prstDash val="solid"/>
           </a:ln>
@@ -3503,11 +3276,11 @@
             <a:avLst/>
           </a:prstGeom>
           <a:solidFill>
-            <a:srgbClr val="F4F1EA"/>
+            <a:srgbClr val="F4F1EB"/>
           </a:solidFill>
           <a:ln w="12700">
             <a:solidFill>
-              <a:srgbClr val="F4F1EA"/>
+              <a:srgbClr val="F4F1EB"/>
             </a:solidFill>
             <a:prstDash val="solid"/>
           </a:ln>
@@ -3608,11 +3381,11 @@
             <a:avLst/>
           </a:prstGeom>
           <a:solidFill>
-            <a:srgbClr val="F4F1EA"/>
+            <a:srgbClr val="F4F1EB"/>
           </a:solidFill>
           <a:ln w="12700">
             <a:solidFill>
-              <a:srgbClr val="F4F1EA"/>
+              <a:srgbClr val="F4F1EB"/>
             </a:solidFill>
             <a:prstDash val="solid"/>
           </a:ln>
@@ -3713,11 +3486,11 @@
             <a:avLst/>
           </a:prstGeom>
           <a:solidFill>
-            <a:srgbClr val="F4F1EA"/>
+            <a:srgbClr val="F4F1EB"/>
           </a:solidFill>
           <a:ln w="12700">
             <a:solidFill>
-              <a:srgbClr val="F4F1EA"/>
+              <a:srgbClr val="F4F1EB"/>
             </a:solidFill>
             <a:prstDash val="solid"/>
           </a:ln>
@@ -3818,11 +3591,11 @@
             <a:avLst/>
           </a:prstGeom>
           <a:solidFill>
-            <a:srgbClr val="F4F1EA"/>
+            <a:srgbClr val="F4F1EB"/>
           </a:solidFill>
           <a:ln w="12700">
             <a:solidFill>
-              <a:srgbClr val="F4F1EA"/>
+              <a:srgbClr val="F4F1EB"/>
             </a:solidFill>
             <a:prstDash val="solid"/>
           </a:ln>
@@ -3923,11 +3696,11 @@
             <a:avLst/>
           </a:prstGeom>
           <a:solidFill>
-            <a:srgbClr val="F4F1EA"/>
+            <a:srgbClr val="F4F1EB"/>
           </a:solidFill>
           <a:ln w="12700">
             <a:solidFill>
-              <a:srgbClr val="F4F1EA"/>
+              <a:srgbClr val="F4F1EB"/>
             </a:solidFill>
             <a:prstDash val="solid"/>
           </a:ln>
@@ -4028,11 +3801,11 @@
             <a:avLst/>
           </a:prstGeom>
           <a:solidFill>
-            <a:srgbClr val="F4F1EA"/>
+            <a:srgbClr val="F4F1EB"/>
           </a:solidFill>
           <a:ln w="12700">
             <a:solidFill>
-              <a:srgbClr val="F4F1EA"/>
+              <a:srgbClr val="F4F1EB"/>
             </a:solidFill>
             <a:prstDash val="solid"/>
           </a:ln>
@@ -4120,6 +3893,36 @@
       </p:sp>
       <p:sp>
         <p:nvSpPr>
+          <p:cNvPr id="28" name="Text 0"/>
+          <p:cNvSpPr/>
+          <p:nvPr>
+            <p:ph idx="101" type="title" hasCustomPrompt="1"/>
+          </p:nvPr>
+        </p:nvSpPr>
+        <p:spPr>
+          <a:xfrm>
+            <a:off x="457200" y="420624"/>
+            <a:ext cx="8229600" cy="731520"/>
+          </a:xfrm>
+          <a:prstGeom prst="rect">
+            <a:avLst/>
+          </a:prstGeom>
+          <a:noFill/>
+          <a:ln/>
+        </p:spPr>
+        <p:txBody>
+          <a:bodyPr wrap="square" lIns="0" tIns="0" rIns="0" bIns="0" rtlCol="0" anchor="t"/>
+          <a:lstStyle/>
+          <a:p>
+            <a:pPr algn="l" indent="0" marL="0">
+              <a:buNone/>
+            </a:pPr>
+            <a:endParaRPr lang="en-US" sz="2600" dirty="0"/>
+          </a:p>
+        </p:txBody>
+      </p:sp>
+      <p:sp>
+        <p:nvSpPr>
           <p:cNvPr id="25" name="Slide Number Placeholder 0"/>
           <p:cNvSpPr>
             <a:spLocks noGrp="1"/>
@@ -4148,7 +3951,7 @@
             <a:lvl1pPr>
               <a:defRPr sz="900">
                 <a:solidFill>
-                  <a:srgbClr val="6B6F76"/>
+                  <a:srgbClr val="6E7B88"/>
                 </a:solidFill>
               </a:defRPr>
             </a:lvl1pPr>
@@ -4190,35 +3993,36 @@
       </p:grpSpPr>
       <p:sp>
         <p:nvSpPr>
-          <p:cNvPr id="2" name="Text 3"/>
-          <p:cNvSpPr/>
-          <p:nvPr>
-            <p:ph idx="103" type="title" hasCustomPrompt="1"/>
-          </p:nvPr>
-        </p:nvSpPr>
-        <p:spPr>
-          <a:xfrm>
-            <a:off x="457200" y="347472"/>
-            <a:ext cx="8229600" cy="685800"/>
-          </a:xfrm>
-          <a:prstGeom prst="rect">
-            <a:avLst/>
-          </a:prstGeom>
-          <a:noFill/>
-          <a:ln/>
-        </p:spPr>
-        <p:txBody>
-          <a:bodyPr wrap="square" lIns="0" tIns="0" rIns="0" bIns="0" rtlCol="0" anchor="ctr"/>
-          <a:lstStyle/>
-          <a:p>
-            <a:pPr algn="l" indent="0" marL="0">
-              <a:buNone/>
-            </a:pPr>
-            <a:r>
-              <a:rPr lang="en-US" sz="2600" b="1" dirty="0">
-                <a:solidFill>
-                  <a:srgbClr val="0B0B0B"/>
-                </a:solidFill>
+          <p:cNvPr id="2" name="Text 0"/>
+          <p:cNvSpPr txBox="1"/>
+          <p:nvPr/>
+        </p:nvSpPr>
+        <p:spPr>
+          <a:xfrm>
+            <a:off x="457200" y="402336"/>
+            <a:ext cx="8229600" cy="749808"/>
+          </a:xfrm>
+          <a:prstGeom prst="rect">
+            <a:avLst/>
+          </a:prstGeom>
+          <a:noFill/>
+          <a:ln/>
+        </p:spPr>
+        <p:txBody>
+          <a:bodyPr wrap="square" lIns="0" tIns="0" rIns="0" bIns="0" rtlCol="0" anchor="t"/>
+          <a:lstStyle/>
+          <a:p>
+            <a:pPr algn="l" indent="0" marL="0">
+              <a:buNone/>
+            </a:pPr>
+            <a:r>
+              <a:rPr lang="en-US" altLang="en-US" sz="2600" b="1" dirty="0">
+                <a:solidFill>
+                  <a:schemeClr val="tx1"/>
+                </a:solidFill>
+                <a:latin typeface="Cambria" pitchFamily="34" charset="0"/>
+                <a:ea typeface="Cambria" pitchFamily="34" charset="-122"/>
+                <a:cs typeface="Cambria" pitchFamily="34" charset="-120"/>
               </a:rPr>
               <a:t>What a good plan must cover</a:t>
             </a:r>
@@ -4277,11 +4081,11 @@
             <a:avLst/>
           </a:prstGeom>
           <a:solidFill>
-            <a:srgbClr val="F4F1EA"/>
+            <a:srgbClr val="F4F1EB"/>
           </a:solidFill>
           <a:ln w="12700">
             <a:solidFill>
-              <a:srgbClr val="F4F1EA"/>
+              <a:srgbClr val="F4F1EB"/>
             </a:solidFill>
             <a:prstDash val="solid"/>
           </a:ln>
@@ -4382,11 +4186,11 @@
             <a:avLst/>
           </a:prstGeom>
           <a:solidFill>
-            <a:srgbClr val="F4F1EA"/>
+            <a:srgbClr val="F4F1EB"/>
           </a:solidFill>
           <a:ln w="12700">
             <a:solidFill>
-              <a:srgbClr val="F4F1EA"/>
+              <a:srgbClr val="F4F1EB"/>
             </a:solidFill>
             <a:prstDash val="solid"/>
           </a:ln>
@@ -4487,11 +4291,11 @@
             <a:avLst/>
           </a:prstGeom>
           <a:solidFill>
-            <a:srgbClr val="F4F1EA"/>
+            <a:srgbClr val="F4F1EB"/>
           </a:solidFill>
           <a:ln w="12700">
             <a:solidFill>
-              <a:srgbClr val="F4F1EA"/>
+              <a:srgbClr val="F4F1EB"/>
             </a:solidFill>
             <a:prstDash val="solid"/>
           </a:ln>
@@ -4592,11 +4396,11 @@
             <a:avLst/>
           </a:prstGeom>
           <a:solidFill>
-            <a:srgbClr val="F4F1EA"/>
+            <a:srgbClr val="F4F1EB"/>
           </a:solidFill>
           <a:ln w="12700">
             <a:solidFill>
-              <a:srgbClr val="F4F1EA"/>
+              <a:srgbClr val="F4F1EB"/>
             </a:solidFill>
             <a:prstDash val="solid"/>
           </a:ln>
@@ -4697,11 +4501,11 @@
             <a:avLst/>
           </a:prstGeom>
           <a:solidFill>
-            <a:srgbClr val="F4F1EA"/>
+            <a:srgbClr val="F4F1EB"/>
           </a:solidFill>
           <a:ln w="12700">
             <a:solidFill>
-              <a:srgbClr val="F4F1EA"/>
+              <a:srgbClr val="F4F1EB"/>
             </a:solidFill>
             <a:prstDash val="solid"/>
           </a:ln>
@@ -4789,6 +4593,36 @@
       </p:sp>
       <p:sp>
         <p:nvSpPr>
+          <p:cNvPr id="19" name="Text 0"/>
+          <p:cNvSpPr/>
+          <p:nvPr>
+            <p:ph idx="101" type="title" hasCustomPrompt="1"/>
+          </p:nvPr>
+        </p:nvSpPr>
+        <p:spPr>
+          <a:xfrm>
+            <a:off x="457200" y="420624"/>
+            <a:ext cx="8229600" cy="731520"/>
+          </a:xfrm>
+          <a:prstGeom prst="rect">
+            <a:avLst/>
+          </a:prstGeom>
+          <a:noFill/>
+          <a:ln/>
+        </p:spPr>
+        <p:txBody>
+          <a:bodyPr wrap="square" lIns="0" tIns="0" rIns="0" bIns="0" rtlCol="0" anchor="t"/>
+          <a:lstStyle/>
+          <a:p>
+            <a:pPr algn="l" indent="0" marL="0">
+              <a:buNone/>
+            </a:pPr>
+            <a:endParaRPr lang="en-US" sz="2600" dirty="0"/>
+          </a:p>
+        </p:txBody>
+      </p:sp>
+      <p:sp>
+        <p:nvSpPr>
           <p:cNvPr id="25" name="Slide Number Placeholder 0"/>
           <p:cNvSpPr>
             <a:spLocks noGrp="1"/>
@@ -4817,7 +4651,7 @@
             <a:lvl1pPr>
               <a:defRPr sz="900">
                 <a:solidFill>
-                  <a:srgbClr val="6B6F76"/>
+                  <a:srgbClr val="6E7B88"/>
                 </a:solidFill>
               </a:defRPr>
             </a:lvl1pPr>
@@ -4904,17 +4738,17 @@
         </p:nvSpPr>
         <p:spPr>
           <a:xfrm>
-            <a:off x="457200" y="2834640"/>
-            <a:ext cx="7772400" cy="731520"/>
-          </a:xfrm>
-          <a:prstGeom prst="rect">
-            <a:avLst/>
-          </a:prstGeom>
-          <a:noFill/>
-          <a:ln/>
-        </p:spPr>
-        <p:txBody>
-          <a:bodyPr wrap="square" lIns="0" tIns="0" rIns="0" bIns="0" rtlCol="0" anchor="t"/>
+            <a:off x="457200" y="2743200"/>
+            <a:ext cx="7772400" cy="868680"/>
+          </a:xfrm>
+          <a:prstGeom prst="rect">
+            <a:avLst/>
+          </a:prstGeom>
+          <a:noFill/>
+          <a:ln/>
+        </p:spPr>
+        <p:txBody>
+          <a:bodyPr wrap="square" lIns="0" tIns="0" rIns="0" bIns="0" rtlCol="0" anchor="b"/>
           <a:lstStyle/>
           <a:p>
             <a:pPr algn="l" indent="0" marL="0">
@@ -4943,17 +4777,17 @@
         </p:nvSpPr>
         <p:spPr>
           <a:xfrm>
-            <a:off x="457200" y="3566160"/>
-            <a:ext cx="7772400" cy="548640"/>
-          </a:xfrm>
-          <a:prstGeom prst="rect">
-            <a:avLst/>
-          </a:prstGeom>
-          <a:noFill/>
-          <a:ln/>
-        </p:spPr>
-        <p:txBody>
-          <a:bodyPr wrap="square" lIns="0" tIns="0" rIns="0" bIns="0" rtlCol="0" anchor="ctr"/>
+            <a:off x="457200" y="3675888"/>
+            <a:ext cx="7772400" cy="502920"/>
+          </a:xfrm>
+          <a:prstGeom prst="rect">
+            <a:avLst/>
+          </a:prstGeom>
+          <a:noFill/>
+          <a:ln/>
+        </p:spPr>
+        <p:txBody>
+          <a:bodyPr wrap="square" lIns="0" tIns="0" rIns="0" bIns="0" rtlCol="0" anchor="t"/>
           <a:lstStyle/>
           <a:p>
             <a:pPr algn="l" indent="0" marL="0">
@@ -5001,7 +4835,7 @@
             <a:lvl1pPr>
               <a:defRPr sz="900">
                 <a:solidFill>
-                  <a:srgbClr val="D8C39A"/>
+                  <a:srgbClr val="D9B38C"/>
                 </a:solidFill>
               </a:defRPr>
             </a:lvl1pPr>
@@ -5043,35 +4877,36 @@
       </p:grpSpPr>
       <p:sp>
         <p:nvSpPr>
-          <p:cNvPr id="2" name="Text 3"/>
-          <p:cNvSpPr/>
-          <p:nvPr>
-            <p:ph idx="103" type="title" hasCustomPrompt="1"/>
-          </p:nvPr>
-        </p:nvSpPr>
-        <p:spPr>
-          <a:xfrm>
-            <a:off x="457200" y="347472"/>
-            <a:ext cx="8229600" cy="685800"/>
-          </a:xfrm>
-          <a:prstGeom prst="rect">
-            <a:avLst/>
-          </a:prstGeom>
-          <a:noFill/>
-          <a:ln/>
-        </p:spPr>
-        <p:txBody>
-          <a:bodyPr wrap="square" lIns="0" tIns="0" rIns="0" bIns="0" rtlCol="0" anchor="ctr"/>
-          <a:lstStyle/>
-          <a:p>
-            <a:pPr algn="l" indent="0" marL="0">
-              <a:buNone/>
-            </a:pPr>
-            <a:r>
-              <a:rPr lang="en-US" sz="2600" b="1" dirty="0">
-                <a:solidFill>
-                  <a:srgbClr val="0B0B0B"/>
-                </a:solidFill>
+          <p:cNvPr id="2" name="Text 0"/>
+          <p:cNvSpPr txBox="1"/>
+          <p:nvPr/>
+        </p:nvSpPr>
+        <p:spPr>
+          <a:xfrm>
+            <a:off x="457200" y="402336"/>
+            <a:ext cx="8229600" cy="749808"/>
+          </a:xfrm>
+          <a:prstGeom prst="rect">
+            <a:avLst/>
+          </a:prstGeom>
+          <a:noFill/>
+          <a:ln/>
+        </p:spPr>
+        <p:txBody>
+          <a:bodyPr wrap="square" lIns="0" tIns="0" rIns="0" bIns="0" rtlCol="0" anchor="t"/>
+          <a:lstStyle/>
+          <a:p>
+            <a:pPr algn="l" indent="0" marL="0">
+              <a:buNone/>
+            </a:pPr>
+            <a:r>
+              <a:rPr lang="en-US" altLang="en-US" sz="2600" b="1" dirty="0">
+                <a:solidFill>
+                  <a:schemeClr val="tx1"/>
+                </a:solidFill>
+                <a:latin typeface="Cambria" pitchFamily="34" charset="0"/>
+                <a:ea typeface="Cambria" pitchFamily="34" charset="-122"/>
+                <a:cs typeface="Cambria" pitchFamily="34" charset="-120"/>
               </a:rPr>
               <a:t>Three cases we see every week</a:t>
             </a:r>
@@ -5130,11 +4965,11 @@
             <a:avLst/>
           </a:prstGeom>
           <a:solidFill>
-            <a:srgbClr val="F4F1EA"/>
+            <a:srgbClr val="F4F1EB"/>
           </a:solidFill>
           <a:ln w="12700">
             <a:solidFill>
-              <a:srgbClr val="F4F1EA"/>
+              <a:srgbClr val="F4F1EB"/>
             </a:solidFill>
             <a:prstDash val="solid"/>
           </a:ln>
@@ -5235,11 +5070,11 @@
             <a:avLst/>
           </a:prstGeom>
           <a:solidFill>
-            <a:srgbClr val="F4F1EA"/>
+            <a:srgbClr val="F4F1EB"/>
           </a:solidFill>
           <a:ln w="12700">
             <a:solidFill>
-              <a:srgbClr val="F4F1EA"/>
+              <a:srgbClr val="F4F1EB"/>
             </a:solidFill>
             <a:prstDash val="solid"/>
           </a:ln>
@@ -5340,11 +5175,11 @@
             <a:avLst/>
           </a:prstGeom>
           <a:solidFill>
-            <a:srgbClr val="F4F1EA"/>
+            <a:srgbClr val="F4F1EB"/>
           </a:solidFill>
           <a:ln w="12700">
             <a:solidFill>
-              <a:srgbClr val="F4F1EA"/>
+              <a:srgbClr val="F4F1EB"/>
             </a:solidFill>
             <a:prstDash val="solid"/>
           </a:ln>
@@ -5432,6 +5267,36 @@
       </p:sp>
       <p:sp>
         <p:nvSpPr>
+          <p:cNvPr id="13" name="Text 0"/>
+          <p:cNvSpPr/>
+          <p:nvPr>
+            <p:ph idx="101" type="title" hasCustomPrompt="1"/>
+          </p:nvPr>
+        </p:nvSpPr>
+        <p:spPr>
+          <a:xfrm>
+            <a:off x="457200" y="420624"/>
+            <a:ext cx="8229600" cy="731520"/>
+          </a:xfrm>
+          <a:prstGeom prst="rect">
+            <a:avLst/>
+          </a:prstGeom>
+          <a:noFill/>
+          <a:ln/>
+        </p:spPr>
+        <p:txBody>
+          <a:bodyPr wrap="square" lIns="0" tIns="0" rIns="0" bIns="0" rtlCol="0" anchor="t"/>
+          <a:lstStyle/>
+          <a:p>
+            <a:pPr algn="l" indent="0" marL="0">
+              <a:buNone/>
+            </a:pPr>
+            <a:endParaRPr lang="en-US" sz="2600" dirty="0"/>
+          </a:p>
+        </p:txBody>
+      </p:sp>
+      <p:sp>
+        <p:nvSpPr>
           <p:cNvPr id="25" name="Slide Number Placeholder 0"/>
           <p:cNvSpPr>
             <a:spLocks noGrp="1"/>
@@ -5460,7 +5325,7 @@
             <a:lvl1pPr>
               <a:defRPr sz="900">
                 <a:solidFill>
-                  <a:srgbClr val="6B6F76"/>
+                  <a:srgbClr val="6E7B88"/>
                 </a:solidFill>
               </a:defRPr>
             </a:lvl1pPr>
@@ -5502,35 +5367,36 @@
       </p:grpSpPr>
       <p:sp>
         <p:nvSpPr>
-          <p:cNvPr id="2" name="Text 3"/>
-          <p:cNvSpPr/>
-          <p:nvPr>
-            <p:ph idx="103" type="title" hasCustomPrompt="1"/>
-          </p:nvPr>
-        </p:nvSpPr>
-        <p:spPr>
-          <a:xfrm>
-            <a:off x="457200" y="347472"/>
-            <a:ext cx="8229600" cy="685800"/>
-          </a:xfrm>
-          <a:prstGeom prst="rect">
-            <a:avLst/>
-          </a:prstGeom>
-          <a:noFill/>
-          <a:ln/>
-        </p:spPr>
-        <p:txBody>
-          <a:bodyPr wrap="square" lIns="0" tIns="0" rIns="0" bIns="0" rtlCol="0" anchor="ctr"/>
-          <a:lstStyle/>
-          <a:p>
-            <a:pPr algn="l" indent="0" marL="0">
-              <a:buNone/>
-            </a:pPr>
-            <a:r>
-              <a:rPr lang="en-US" sz="2600" b="1" dirty="0">
-                <a:solidFill>
-                  <a:srgbClr val="0B0B0B"/>
-                </a:solidFill>
+          <p:cNvPr id="2" name="Text 0"/>
+          <p:cNvSpPr txBox="1"/>
+          <p:nvPr/>
+        </p:nvSpPr>
+        <p:spPr>
+          <a:xfrm>
+            <a:off x="457200" y="402336"/>
+            <a:ext cx="8229600" cy="749808"/>
+          </a:xfrm>
+          <a:prstGeom prst="rect">
+            <a:avLst/>
+          </a:prstGeom>
+          <a:noFill/>
+          <a:ln/>
+        </p:spPr>
+        <p:txBody>
+          <a:bodyPr wrap="square" lIns="0" tIns="0" rIns="0" bIns="0" rtlCol="0" anchor="t"/>
+          <a:lstStyle/>
+          <a:p>
+            <a:pPr algn="l" indent="0" marL="0">
+              <a:buNone/>
+            </a:pPr>
+            <a:r>
+              <a:rPr lang="en-US" altLang="en-US" sz="2600" b="1" dirty="0">
+                <a:solidFill>
+                  <a:schemeClr val="tx1"/>
+                </a:solidFill>
+                <a:latin typeface="Cambria" pitchFamily="34" charset="0"/>
+                <a:ea typeface="Cambria" pitchFamily="34" charset="-122"/>
+                <a:cs typeface="Cambria" pitchFamily="34" charset="-120"/>
               </a:rPr>
               <a:t>How to start: five steps</a:t>
             </a:r>
@@ -5591,7 +5457,7 @@
           <a:noFill/>
           <a:ln w="9525">
             <a:solidFill>
-              <a:srgbClr val="D8C39A"/>
+              <a:srgbClr val="D9B38C"/>
             </a:solidFill>
             <a:prstDash val="solid"/>
           </a:ln>
@@ -5612,11 +5478,11 @@
             <a:avLst/>
           </a:prstGeom>
           <a:solidFill>
-            <a:srgbClr val="0B0B0B"/>
+            <a:srgbClr val="0E2238"/>
           </a:solidFill>
           <a:ln w="12700">
             <a:solidFill>
-              <a:srgbClr val="B08D57"/>
+              <a:srgbClr val="B5723B"/>
             </a:solidFill>
             <a:prstDash val="solid"/>
           </a:ln>
@@ -5748,11 +5614,11 @@
             <a:avLst/>
           </a:prstGeom>
           <a:solidFill>
-            <a:srgbClr val="0B0B0B"/>
+            <a:srgbClr val="0E2238"/>
           </a:solidFill>
           <a:ln w="12700">
             <a:solidFill>
-              <a:srgbClr val="B08D57"/>
+              <a:srgbClr val="B5723B"/>
             </a:solidFill>
             <a:prstDash val="solid"/>
           </a:ln>
@@ -5884,11 +5750,11 @@
             <a:avLst/>
           </a:prstGeom>
           <a:solidFill>
-            <a:srgbClr val="0B0B0B"/>
+            <a:srgbClr val="0E2238"/>
           </a:solidFill>
           <a:ln w="12700">
             <a:solidFill>
-              <a:srgbClr val="B08D57"/>
+              <a:srgbClr val="B5723B"/>
             </a:solidFill>
             <a:prstDash val="solid"/>
           </a:ln>
@@ -6020,11 +5886,11 @@
             <a:avLst/>
           </a:prstGeom>
           <a:solidFill>
-            <a:srgbClr val="0B0B0B"/>
+            <a:srgbClr val="0E2238"/>
           </a:solidFill>
           <a:ln w="12700">
             <a:solidFill>
-              <a:srgbClr val="B08D57"/>
+              <a:srgbClr val="B5723B"/>
             </a:solidFill>
             <a:prstDash val="solid"/>
           </a:ln>
@@ -6156,11 +6022,11 @@
             <a:avLst/>
           </a:prstGeom>
           <a:solidFill>
-            <a:srgbClr val="0B0B0B"/>
+            <a:srgbClr val="0E2238"/>
           </a:solidFill>
           <a:ln w="12700">
             <a:solidFill>
-              <a:srgbClr val="B08D57"/>
+              <a:srgbClr val="B5723B"/>
             </a:solidFill>
             <a:prstDash val="solid"/>
           </a:ln>
@@ -6274,6 +6140,36 @@
               <a:t>With the chosen authority, with direct follow-up.</a:t>
             </a:r>
             <a:endParaRPr lang="en-US" sz="1050" dirty="0"/>
+          </a:p>
+        </p:txBody>
+      </p:sp>
+      <p:sp>
+        <p:nvSpPr>
+          <p:cNvPr id="25" name="Text 0"/>
+          <p:cNvSpPr/>
+          <p:nvPr>
+            <p:ph idx="101" type="title" hasCustomPrompt="1"/>
+          </p:nvPr>
+        </p:nvSpPr>
+        <p:spPr>
+          <a:xfrm>
+            <a:off x="457200" y="420624"/>
+            <a:ext cx="8229600" cy="731520"/>
+          </a:xfrm>
+          <a:prstGeom prst="rect">
+            <a:avLst/>
+          </a:prstGeom>
+          <a:noFill/>
+          <a:ln/>
+        </p:spPr>
+        <p:txBody>
+          <a:bodyPr wrap="square" lIns="0" tIns="0" rIns="0" bIns="0" rtlCol="0" anchor="t"/>
+          <a:lstStyle/>
+          <a:p>
+            <a:pPr algn="l" indent="0" marL="0">
+              <a:buNone/>
+            </a:pPr>
+            <a:endParaRPr lang="en-US" sz="2600" dirty="0"/>
           </a:p>
         </p:txBody>
       </p:sp>
@@ -6307,7 +6203,7 @@
             <a:lvl1pPr>
               <a:defRPr sz="900">
                 <a:solidFill>
-                  <a:srgbClr val="6B6F76"/>
+                  <a:srgbClr val="6E7B88"/>
                 </a:solidFill>
               </a:defRPr>
             </a:lvl1pPr>
@@ -6349,35 +6245,36 @@
       </p:grpSpPr>
       <p:sp>
         <p:nvSpPr>
-          <p:cNvPr id="2" name="Text 3"/>
-          <p:cNvSpPr/>
-          <p:nvPr>
-            <p:ph idx="103" type="title" hasCustomPrompt="1"/>
-          </p:nvPr>
-        </p:nvSpPr>
-        <p:spPr>
-          <a:xfrm>
-            <a:off x="457200" y="347472"/>
-            <a:ext cx="8229600" cy="685800"/>
-          </a:xfrm>
-          <a:prstGeom prst="rect">
-            <a:avLst/>
-          </a:prstGeom>
-          <a:noFill/>
-          <a:ln/>
-        </p:spPr>
-        <p:txBody>
-          <a:bodyPr wrap="square" lIns="0" tIns="0" rIns="0" bIns="0" rtlCol="0" anchor="ctr"/>
-          <a:lstStyle/>
-          <a:p>
-            <a:pPr algn="l" indent="0" marL="0">
-              <a:buNone/>
-            </a:pPr>
-            <a:r>
-              <a:rPr lang="en-US" sz="2600" b="1" dirty="0">
-                <a:solidFill>
-                  <a:srgbClr val="0B0B0B"/>
-                </a:solidFill>
+          <p:cNvPr id="2" name="Text 0"/>
+          <p:cNvSpPr txBox="1"/>
+          <p:nvPr/>
+        </p:nvSpPr>
+        <p:spPr>
+          <a:xfrm>
+            <a:off x="457200" y="402336"/>
+            <a:ext cx="8229600" cy="749808"/>
+          </a:xfrm>
+          <a:prstGeom prst="rect">
+            <a:avLst/>
+          </a:prstGeom>
+          <a:noFill/>
+          <a:ln/>
+        </p:spPr>
+        <p:txBody>
+          <a:bodyPr wrap="square" lIns="0" tIns="0" rIns="0" bIns="0" rtlCol="0" anchor="t"/>
+          <a:lstStyle/>
+          <a:p>
+            <a:pPr algn="l" indent="0" marL="0">
+              <a:buNone/>
+            </a:pPr>
+            <a:r>
+              <a:rPr lang="en-US" altLang="en-US" sz="2600" b="1" dirty="0">
+                <a:solidFill>
+                  <a:schemeClr val="tx1"/>
+                </a:solidFill>
+                <a:latin typeface="Cambria" pitchFamily="34" charset="0"/>
+                <a:ea typeface="Cambria" pitchFamily="34" charset="-122"/>
+                <a:cs typeface="Cambria" pitchFamily="34" charset="-120"/>
               </a:rPr>
               <a:t>A quick self-check</a:t>
             </a:r>
@@ -6508,11 +6405,11 @@
             <a:avLst/>
           </a:prstGeom>
           <a:solidFill>
-            <a:srgbClr val="F4F1EA"/>
+            <a:srgbClr val="F4F1EB"/>
           </a:solidFill>
           <a:ln w="12700">
             <a:solidFill>
-              <a:srgbClr val="F4F1EA"/>
+              <a:srgbClr val="F4F1EB"/>
             </a:solidFill>
             <a:prstDash val="solid"/>
           </a:ln>
@@ -6633,7 +6530,7 @@
           </a:solidFill>
           <a:ln w="12700">
             <a:solidFill>
-              <a:srgbClr val="F4F1EA"/>
+              <a:srgbClr val="F4F1EB"/>
             </a:solidFill>
             <a:prstDash val="solid"/>
           </a:ln>
@@ -6750,11 +6647,11 @@
             <a:avLst/>
           </a:prstGeom>
           <a:solidFill>
-            <a:srgbClr val="F4F1EA"/>
+            <a:srgbClr val="F4F1EB"/>
           </a:solidFill>
           <a:ln w="12700">
             <a:solidFill>
-              <a:srgbClr val="F4F1EA"/>
+              <a:srgbClr val="F4F1EB"/>
             </a:solidFill>
             <a:prstDash val="solid"/>
           </a:ln>
@@ -6875,7 +6772,7 @@
           </a:solidFill>
           <a:ln w="12700">
             <a:solidFill>
-              <a:srgbClr val="F4F1EA"/>
+              <a:srgbClr val="F4F1EB"/>
             </a:solidFill>
             <a:prstDash val="solid"/>
           </a:ln>
@@ -6992,11 +6889,11 @@
             <a:avLst/>
           </a:prstGeom>
           <a:solidFill>
-            <a:srgbClr val="F4F1EA"/>
+            <a:srgbClr val="F4F1EB"/>
           </a:solidFill>
           <a:ln w="12700">
             <a:solidFill>
-              <a:srgbClr val="F4F1EA"/>
+              <a:srgbClr val="F4F1EB"/>
             </a:solidFill>
             <a:prstDash val="solid"/>
           </a:ln>
@@ -7117,7 +7014,7 @@
           </a:solidFill>
           <a:ln w="12700">
             <a:solidFill>
-              <a:srgbClr val="F4F1EA"/>
+              <a:srgbClr val="F4F1EB"/>
             </a:solidFill>
             <a:prstDash val="solid"/>
           </a:ln>
@@ -7257,6 +7154,36 @@
       </p:sp>
       <p:sp>
         <p:nvSpPr>
+          <p:cNvPr id="31" name="Text 0"/>
+          <p:cNvSpPr/>
+          <p:nvPr>
+            <p:ph idx="101" type="title" hasCustomPrompt="1"/>
+          </p:nvPr>
+        </p:nvSpPr>
+        <p:spPr>
+          <a:xfrm>
+            <a:off x="457200" y="420624"/>
+            <a:ext cx="8229600" cy="731520"/>
+          </a:xfrm>
+          <a:prstGeom prst="rect">
+            <a:avLst/>
+          </a:prstGeom>
+          <a:noFill/>
+          <a:ln/>
+        </p:spPr>
+        <p:txBody>
+          <a:bodyPr wrap="square" lIns="0" tIns="0" rIns="0" bIns="0" rtlCol="0" anchor="t"/>
+          <a:lstStyle/>
+          <a:p>
+            <a:pPr algn="l" indent="0" marL="0">
+              <a:buNone/>
+            </a:pPr>
+            <a:endParaRPr lang="en-US" sz="2600" dirty="0"/>
+          </a:p>
+        </p:txBody>
+      </p:sp>
+      <p:sp>
+        <p:nvSpPr>
           <p:cNvPr id="25" name="Slide Number Placeholder 0"/>
           <p:cNvSpPr>
             <a:spLocks noGrp="1"/>
@@ -7285,7 +7212,7 @@
             <a:lvl1pPr>
               <a:defRPr sz="900">
                 <a:solidFill>
-                  <a:srgbClr val="6B6F76"/>
+                  <a:srgbClr val="6E7B88"/>
                 </a:solidFill>
               </a:defRPr>
             </a:lvl1pPr>
@@ -7380,7 +7307,7 @@
           </a:prstGeom>
           <a:ln w="9525">
             <a:solidFill>
-              <a:srgbClr val="B08D57"/>
+              <a:srgbClr val="B5723B"/>
             </a:solidFill>
             <a:prstDash val="solid"/>
           </a:ln>
@@ -7497,7 +7424,7 @@
           </a:prstGeom>
           <a:ln w="9525">
             <a:solidFill>
-              <a:srgbClr val="B08D57"/>
+              <a:srgbClr val="B5723B"/>
             </a:solidFill>
             <a:prstDash val="solid"/>
           </a:ln>
@@ -7614,7 +7541,7 @@
           </a:prstGeom>
           <a:ln w="9525">
             <a:solidFill>
-              <a:srgbClr val="B08D57"/>
+              <a:srgbClr val="B5723B"/>
             </a:solidFill>
             <a:prstDash val="solid"/>
           </a:ln>
@@ -7731,7 +7658,7 @@
           </a:prstGeom>
           <a:ln w="9525">
             <a:solidFill>
-              <a:srgbClr val="B08D57"/>
+              <a:srgbClr val="B5723B"/>
             </a:solidFill>
             <a:prstDash val="solid"/>
           </a:ln>
@@ -7862,7 +7789,7 @@
             <a:lvl1pPr>
               <a:defRPr sz="900">
                 <a:solidFill>
-                  <a:srgbClr val="D8C39A"/>
+                  <a:srgbClr val="D9B38C"/>
                 </a:solidFill>
               </a:defRPr>
             </a:lvl1pPr>
@@ -7918,7 +7845,7 @@
           </a:prstGeom>
           <a:ln w="9525">
             <a:solidFill>
-              <a:srgbClr val="B08D57"/>
+              <a:srgbClr val="B5723B"/>
             </a:solidFill>
             <a:prstDash val="solid"/>
           </a:ln>
@@ -8068,7 +7995,7 @@
             <a:lvl1pPr>
               <a:defRPr sz="900">
                 <a:solidFill>
-                  <a:srgbClr val="D8C39A"/>
+                  <a:srgbClr val="D9B38C"/>
                 </a:solidFill>
               </a:defRPr>
             </a:lvl1pPr>
@@ -8124,7 +8051,7 @@
           </a:prstGeom>
           <a:ln w="9525">
             <a:solidFill>
-              <a:srgbClr val="B08D57"/>
+              <a:srgbClr val="B5723B"/>
             </a:solidFill>
             <a:prstDash val="solid"/>
           </a:ln>
@@ -8447,42 +8374,6 @@
       </p:sp>
       <p:sp>
         <p:nvSpPr>
-          <p:cNvPr id="13" name="Text 7"/>
-          <p:cNvSpPr txBox="1"/>
-          <p:nvPr/>
-        </p:nvSpPr>
-        <p:spPr>
-          <a:xfrm>
-            <a:off x="868680" y="4206240"/>
-            <a:ext cx="7406640" cy="365760"/>
-          </a:xfrm>
-          <a:prstGeom prst="rect">
-            <a:avLst/>
-          </a:prstGeom>
-          <a:noFill/>
-          <a:ln/>
-        </p:spPr>
-        <p:txBody>
-          <a:bodyPr wrap="square" lIns="0" tIns="0" rIns="0" bIns="0" rtlCol="0" anchor="ctr"/>
-          <a:lstStyle/>
-          <a:p>
-            <a:pPr algn="l" indent="0" marL="0">
-              <a:buNone/>
-            </a:pPr>
-            <a:r>
-              <a:rPr lang="en-US" altLang="en-US" sz="1000" dirty="0">
-                <a:solidFill>
-                  <a:schemeClr val="accent1"/>
-                </a:solidFill>
-              </a:rPr>
-              <a:t>Rashid Alkaitoob Advocates &amp; Legal Consultants</a:t>
-            </a:r>
-            <a:endParaRPr lang="en-US" sz="1000" dirty="0"/>
-          </a:p>
-        </p:txBody>
-      </p:sp>
-      <p:sp>
-        <p:nvSpPr>
           <p:cNvPr id="25" name="Slide Number Placeholder 0"/>
           <p:cNvSpPr>
             <a:spLocks noGrp="1"/>
@@ -8511,7 +8402,7 @@
             <a:lvl1pPr>
               <a:defRPr sz="900">
                 <a:solidFill>
-                  <a:srgbClr val="D8C39A"/>
+                  <a:srgbClr val="D9B38C"/>
                 </a:solidFill>
               </a:defRPr>
             </a:lvl1pPr>
@@ -8553,75 +8444,76 @@
       </p:grpSpPr>
       <p:sp>
         <p:nvSpPr>
-          <p:cNvPr id="2" name="Text 3"/>
-          <p:cNvSpPr/>
-          <p:nvPr>
-            <p:ph idx="103" type="title" hasCustomPrompt="1"/>
-          </p:nvPr>
-        </p:nvSpPr>
-        <p:spPr>
-          <a:xfrm>
-            <a:off x="457200" y="347472"/>
-            <a:ext cx="8229600" cy="685800"/>
-          </a:xfrm>
-          <a:prstGeom prst="rect">
-            <a:avLst/>
-          </a:prstGeom>
-          <a:noFill/>
-          <a:ln/>
-        </p:spPr>
-        <p:txBody>
-          <a:bodyPr wrap="square" lIns="0" tIns="0" rIns="0" bIns="0" rtlCol="0" anchor="ctr"/>
-          <a:lstStyle/>
-          <a:p>
-            <a:pPr algn="l" indent="0" marL="0">
-              <a:buNone/>
-            </a:pPr>
-            <a:r>
-              <a:rPr lang="en-US" sz="2600" b="1" dirty="0">
-                <a:solidFill>
-                  <a:srgbClr val="0B0B0B"/>
-                </a:solidFill>
-              </a:rPr>
-              <a:t>What we will cover today</a:t>
-            </a:r>
-            <a:endParaRPr lang="en-US" sz="2600" dirty="0"/>
-          </a:p>
-        </p:txBody>
-      </p:sp>
-      <p:sp>
-        <p:nvSpPr>
-          <p:cNvPr id="3" name="Text 1"/>
-          <p:cNvSpPr txBox="1"/>
-          <p:nvPr/>
-        </p:nvSpPr>
-        <p:spPr>
-          <a:xfrm>
-            <a:off x="457200" y="1234440"/>
-            <a:ext cx="457200" cy="530352"/>
-          </a:xfrm>
-          <a:prstGeom prst="rect">
-            <a:avLst/>
-          </a:prstGeom>
-          <a:noFill/>
-          <a:ln/>
-        </p:spPr>
-        <p:txBody>
-          <a:bodyPr wrap="square" lIns="0" tIns="0" rIns="0" bIns="0" rtlCol="0" anchor="ctr"/>
-          <a:lstStyle/>
-          <a:p>
-            <a:pPr algn="l" indent="0" marL="0">
-              <a:buNone/>
-            </a:pPr>
-            <a:r>
-              <a:rPr lang="en-US" sz="1800" b="1" dirty="0">
-                <a:solidFill>
-                  <a:schemeClr val="accent1"/>
+          <p:cNvPr id="2" name="Text 0"/>
+          <p:cNvSpPr txBox="1"/>
+          <p:nvPr/>
+        </p:nvSpPr>
+        <p:spPr>
+          <a:xfrm>
+            <a:off x="457200" y="402336"/>
+            <a:ext cx="8229600" cy="749808"/>
+          </a:xfrm>
+          <a:prstGeom prst="rect">
+            <a:avLst/>
+          </a:prstGeom>
+          <a:noFill/>
+          <a:ln/>
+        </p:spPr>
+        <p:txBody>
+          <a:bodyPr wrap="square" lIns="0" tIns="0" rIns="0" bIns="0" rtlCol="0" anchor="t"/>
+          <a:lstStyle/>
+          <a:p>
+            <a:pPr algn="l" indent="0" marL="0">
+              <a:buNone/>
+            </a:pPr>
+            <a:r>
+              <a:rPr lang="en-US" altLang="en-US" sz="2600" b="1" dirty="0">
+                <a:solidFill>
+                  <a:schemeClr val="tx1"/>
                 </a:solidFill>
                 <a:latin typeface="Cambria" pitchFamily="34" charset="0"/>
                 <a:ea typeface="Cambria" pitchFamily="34" charset="-122"/>
                 <a:cs typeface="Cambria" pitchFamily="34" charset="-120"/>
               </a:rPr>
+              <a:t>What we will cover today</a:t>
+            </a:r>
+            <a:endParaRPr lang="en-US" sz="2600" dirty="0"/>
+          </a:p>
+        </p:txBody>
+      </p:sp>
+      <p:sp>
+        <p:nvSpPr>
+          <p:cNvPr id="3" name="Text 1"/>
+          <p:cNvSpPr txBox="1"/>
+          <p:nvPr/>
+        </p:nvSpPr>
+        <p:spPr>
+          <a:xfrm>
+            <a:off x="457200" y="1234440"/>
+            <a:ext cx="457200" cy="530352"/>
+          </a:xfrm>
+          <a:prstGeom prst="rect">
+            <a:avLst/>
+          </a:prstGeom>
+          <a:noFill/>
+          <a:ln/>
+        </p:spPr>
+        <p:txBody>
+          <a:bodyPr wrap="square" lIns="0" tIns="0" rIns="0" bIns="0" rtlCol="0" anchor="ctr"/>
+          <a:lstStyle/>
+          <a:p>
+            <a:pPr algn="l" indent="0" marL="0">
+              <a:buNone/>
+            </a:pPr>
+            <a:r>
+              <a:rPr lang="en-US" sz="1800" b="1" dirty="0">
+                <a:solidFill>
+                  <a:schemeClr val="accent1"/>
+                </a:solidFill>
+                <a:latin typeface="Cambria" pitchFamily="34" charset="0"/>
+                <a:ea typeface="Cambria" pitchFamily="34" charset="-122"/>
+                <a:cs typeface="Cambria" pitchFamily="34" charset="-120"/>
+              </a:rPr>
               <a:t>01</a:t>
             </a:r>
             <a:endParaRPr lang="en-US" sz="1800" dirty="0"/>
@@ -8681,7 +8573,7 @@
           <a:noFill/>
           <a:ln w="6350">
             <a:solidFill>
-              <a:srgbClr val="E9E4DA"/>
+              <a:srgbClr val="E6E1D8"/>
             </a:solidFill>
             <a:prstDash val="solid"/>
           </a:ln>
@@ -8779,7 +8671,7 @@
           <a:noFill/>
           <a:ln w="6350">
             <a:solidFill>
-              <a:srgbClr val="E9E4DA"/>
+              <a:srgbClr val="E6E1D8"/>
             </a:solidFill>
             <a:prstDash val="solid"/>
           </a:ln>
@@ -8877,7 +8769,7 @@
           <a:noFill/>
           <a:ln w="6350">
             <a:solidFill>
-              <a:srgbClr val="E9E4DA"/>
+              <a:srgbClr val="E6E1D8"/>
             </a:solidFill>
             <a:prstDash val="solid"/>
           </a:ln>
@@ -8975,7 +8867,7 @@
           <a:noFill/>
           <a:ln w="6350">
             <a:solidFill>
-              <a:srgbClr val="E9E4DA"/>
+              <a:srgbClr val="E6E1D8"/>
             </a:solidFill>
             <a:prstDash val="solid"/>
           </a:ln>
@@ -9073,7 +8965,7 @@
           <a:noFill/>
           <a:ln w="6350">
             <a:solidFill>
-              <a:srgbClr val="E9E4DA"/>
+              <a:srgbClr val="E6E1D8"/>
             </a:solidFill>
             <a:prstDash val="solid"/>
           </a:ln>
@@ -9171,11 +9063,41 @@
           <a:noFill/>
           <a:ln w="6350">
             <a:solidFill>
-              <a:srgbClr val="E9E4DA"/>
+              <a:srgbClr val="E6E1D8"/>
             </a:solidFill>
             <a:prstDash val="solid"/>
           </a:ln>
         </p:spPr>
+      </p:sp>
+      <p:sp>
+        <p:nvSpPr>
+          <p:cNvPr id="21" name="Text 0"/>
+          <p:cNvSpPr/>
+          <p:nvPr>
+            <p:ph idx="101" type="title" hasCustomPrompt="1"/>
+          </p:nvPr>
+        </p:nvSpPr>
+        <p:spPr>
+          <a:xfrm>
+            <a:off x="457200" y="420624"/>
+            <a:ext cx="8229600" cy="731520"/>
+          </a:xfrm>
+          <a:prstGeom prst="rect">
+            <a:avLst/>
+          </a:prstGeom>
+          <a:noFill/>
+          <a:ln/>
+        </p:spPr>
+        <p:txBody>
+          <a:bodyPr wrap="square" lIns="0" tIns="0" rIns="0" bIns="0" rtlCol="0" anchor="t"/>
+          <a:lstStyle/>
+          <a:p>
+            <a:pPr algn="l" indent="0" marL="0">
+              <a:buNone/>
+            </a:pPr>
+            <a:endParaRPr lang="en-US" sz="2600" dirty="0"/>
+          </a:p>
+        </p:txBody>
       </p:sp>
       <p:sp>
         <p:nvSpPr>
@@ -9207,7 +9129,7 @@
             <a:lvl1pPr>
               <a:defRPr sz="900">
                 <a:solidFill>
-                  <a:srgbClr val="6B6F76"/>
+                  <a:srgbClr val="6E7B88"/>
                 </a:solidFill>
               </a:defRPr>
             </a:lvl1pPr>
@@ -9294,17 +9216,17 @@
         </p:nvSpPr>
         <p:spPr>
           <a:xfrm>
-            <a:off x="457200" y="2834640"/>
-            <a:ext cx="7772400" cy="731520"/>
-          </a:xfrm>
-          <a:prstGeom prst="rect">
-            <a:avLst/>
-          </a:prstGeom>
-          <a:noFill/>
-          <a:ln/>
-        </p:spPr>
-        <p:txBody>
-          <a:bodyPr wrap="square" lIns="0" tIns="0" rIns="0" bIns="0" rtlCol="0" anchor="t"/>
+            <a:off x="457200" y="2743200"/>
+            <a:ext cx="7772400" cy="868680"/>
+          </a:xfrm>
+          <a:prstGeom prst="rect">
+            <a:avLst/>
+          </a:prstGeom>
+          <a:noFill/>
+          <a:ln/>
+        </p:spPr>
+        <p:txBody>
+          <a:bodyPr wrap="square" lIns="0" tIns="0" rIns="0" bIns="0" rtlCol="0" anchor="b"/>
           <a:lstStyle/>
           <a:p>
             <a:pPr algn="l" indent="0" marL="0">
@@ -9333,17 +9255,17 @@
         </p:nvSpPr>
         <p:spPr>
           <a:xfrm>
-            <a:off x="457200" y="3566160"/>
-            <a:ext cx="7772400" cy="548640"/>
-          </a:xfrm>
-          <a:prstGeom prst="rect">
-            <a:avLst/>
-          </a:prstGeom>
-          <a:noFill/>
-          <a:ln/>
-        </p:spPr>
-        <p:txBody>
-          <a:bodyPr wrap="square" lIns="0" tIns="0" rIns="0" bIns="0" rtlCol="0" anchor="ctr"/>
+            <a:off x="457200" y="3675888"/>
+            <a:ext cx="7772400" cy="502920"/>
+          </a:xfrm>
+          <a:prstGeom prst="rect">
+            <a:avLst/>
+          </a:prstGeom>
+          <a:noFill/>
+          <a:ln/>
+        </p:spPr>
+        <p:txBody>
+          <a:bodyPr wrap="square" lIns="0" tIns="0" rIns="0" bIns="0" rtlCol="0" anchor="t"/>
           <a:lstStyle/>
           <a:p>
             <a:pPr algn="l" indent="0" marL="0">
@@ -9391,7 +9313,7 @@
             <a:lvl1pPr>
               <a:defRPr sz="900">
                 <a:solidFill>
-                  <a:srgbClr val="D8C39A"/>
+                  <a:srgbClr val="D9B38C"/>
                 </a:solidFill>
               </a:defRPr>
             </a:lvl1pPr>
@@ -9433,35 +9355,36 @@
       </p:grpSpPr>
       <p:sp>
         <p:nvSpPr>
-          <p:cNvPr id="2" name="Text 3"/>
-          <p:cNvSpPr/>
-          <p:nvPr>
-            <p:ph idx="103" type="title" hasCustomPrompt="1"/>
-          </p:nvPr>
-        </p:nvSpPr>
-        <p:spPr>
-          <a:xfrm>
-            <a:off x="457200" y="347472"/>
-            <a:ext cx="8229600" cy="685800"/>
-          </a:xfrm>
-          <a:prstGeom prst="rect">
-            <a:avLst/>
-          </a:prstGeom>
-          <a:noFill/>
-          <a:ln/>
-        </p:spPr>
-        <p:txBody>
-          <a:bodyPr wrap="square" lIns="0" tIns="0" rIns="0" bIns="0" rtlCol="0" anchor="ctr"/>
-          <a:lstStyle/>
-          <a:p>
-            <a:pPr algn="l" indent="0" marL="0">
-              <a:buNone/>
-            </a:pPr>
-            <a:r>
-              <a:rPr lang="en-US" sz="2600" b="1" dirty="0">
-                <a:solidFill>
-                  <a:srgbClr val="0B0B0B"/>
-                </a:solidFill>
+          <p:cNvPr id="2" name="Text 0"/>
+          <p:cNvSpPr txBox="1"/>
+          <p:nvPr/>
+        </p:nvSpPr>
+        <p:spPr>
+          <a:xfrm>
+            <a:off x="457200" y="402336"/>
+            <a:ext cx="8229600" cy="749808"/>
+          </a:xfrm>
+          <a:prstGeom prst="rect">
+            <a:avLst/>
+          </a:prstGeom>
+          <a:noFill/>
+          <a:ln/>
+        </p:spPr>
+        <p:txBody>
+          <a:bodyPr wrap="square" lIns="0" tIns="0" rIns="0" bIns="0" rtlCol="0" anchor="t"/>
+          <a:lstStyle/>
+          <a:p>
+            <a:pPr algn="l" indent="0" marL="0">
+              <a:buNone/>
+            </a:pPr>
+            <a:r>
+              <a:rPr lang="en-US" altLang="en-US" sz="2600" b="1" dirty="0">
+                <a:solidFill>
+                  <a:schemeClr val="tx1"/>
+                </a:solidFill>
+                <a:latin typeface="Cambria" pitchFamily="34" charset="0"/>
+                <a:ea typeface="Cambria" pitchFamily="34" charset="-122"/>
+                <a:cs typeface="Cambria" pitchFamily="34" charset="-120"/>
               </a:rPr>
               <a:t>Common mistakes foreign investors make</a:t>
             </a:r>
@@ -9520,11 +9443,11 @@
             <a:avLst/>
           </a:prstGeom>
           <a:solidFill>
-            <a:srgbClr val="F4F1EA"/>
+            <a:srgbClr val="F4F1EB"/>
           </a:solidFill>
           <a:ln w="12700">
             <a:solidFill>
-              <a:srgbClr val="F4F1EA"/>
+              <a:srgbClr val="F4F1EB"/>
             </a:solidFill>
             <a:prstDash val="solid"/>
           </a:ln>
@@ -9625,11 +9548,11 @@
             <a:avLst/>
           </a:prstGeom>
           <a:solidFill>
-            <a:srgbClr val="F4F1EA"/>
+            <a:srgbClr val="F4F1EB"/>
           </a:solidFill>
           <a:ln w="12700">
             <a:solidFill>
-              <a:srgbClr val="F4F1EA"/>
+              <a:srgbClr val="F4F1EB"/>
             </a:solidFill>
             <a:prstDash val="solid"/>
           </a:ln>
@@ -9730,11 +9653,11 @@
             <a:avLst/>
           </a:prstGeom>
           <a:solidFill>
-            <a:srgbClr val="F4F1EA"/>
+            <a:srgbClr val="F4F1EB"/>
           </a:solidFill>
           <a:ln w="12700">
             <a:solidFill>
-              <a:srgbClr val="F4F1EA"/>
+              <a:srgbClr val="F4F1EB"/>
             </a:solidFill>
             <a:prstDash val="solid"/>
           </a:ln>
@@ -9835,11 +9758,11 @@
             <a:avLst/>
           </a:prstGeom>
           <a:solidFill>
-            <a:srgbClr val="F4F1EA"/>
+            <a:srgbClr val="F4F1EB"/>
           </a:solidFill>
           <a:ln w="12700">
             <a:solidFill>
-              <a:srgbClr val="F4F1EA"/>
+              <a:srgbClr val="F4F1EB"/>
             </a:solidFill>
             <a:prstDash val="solid"/>
           </a:ln>
@@ -9940,11 +9863,11 @@
             <a:avLst/>
           </a:prstGeom>
           <a:solidFill>
-            <a:srgbClr val="F4F1EA"/>
+            <a:srgbClr val="F4F1EB"/>
           </a:solidFill>
           <a:ln w="12700">
             <a:solidFill>
-              <a:srgbClr val="F4F1EA"/>
+              <a:srgbClr val="F4F1EB"/>
             </a:solidFill>
             <a:prstDash val="solid"/>
           </a:ln>
@@ -10045,11 +9968,11 @@
             <a:avLst/>
           </a:prstGeom>
           <a:solidFill>
-            <a:srgbClr val="0B0B0B"/>
+            <a:srgbClr val="0E2238"/>
           </a:solidFill>
           <a:ln w="12700">
             <a:solidFill>
-              <a:srgbClr val="0B0B0B"/>
+              <a:srgbClr val="0E2238"/>
             </a:solidFill>
             <a:prstDash val="solid"/>
           </a:ln>
@@ -10071,7 +9994,7 @@
           </a:prstGeom>
           <a:ln w="9525">
             <a:solidFill>
-              <a:srgbClr val="B08D57"/>
+              <a:srgbClr val="B5723B"/>
             </a:solidFill>
             <a:prstDash val="solid"/>
           </a:ln>
@@ -10149,6 +10072,36 @@
               <a:t>Because nobody asked the investor the right question at the right moment. Today we ask it.</a:t>
             </a:r>
             <a:endParaRPr lang="en-US" sz="1150" dirty="0"/>
+          </a:p>
+        </p:txBody>
+      </p:sp>
+      <p:sp>
+        <p:nvSpPr>
+          <p:cNvPr id="23" name="Text 0"/>
+          <p:cNvSpPr/>
+          <p:nvPr>
+            <p:ph idx="101" type="title" hasCustomPrompt="1"/>
+          </p:nvPr>
+        </p:nvSpPr>
+        <p:spPr>
+          <a:xfrm>
+            <a:off x="457200" y="420624"/>
+            <a:ext cx="8229600" cy="731520"/>
+          </a:xfrm>
+          <a:prstGeom prst="rect">
+            <a:avLst/>
+          </a:prstGeom>
+          <a:noFill/>
+          <a:ln/>
+        </p:spPr>
+        <p:txBody>
+          <a:bodyPr wrap="square" lIns="0" tIns="0" rIns="0" bIns="0" rtlCol="0" anchor="t"/>
+          <a:lstStyle/>
+          <a:p>
+            <a:pPr algn="l" indent="0" marL="0">
+              <a:buNone/>
+            </a:pPr>
+            <a:endParaRPr lang="en-US" sz="2600" dirty="0"/>
           </a:p>
         </p:txBody>
       </p:sp>
@@ -10182,7 +10135,7 @@
             <a:lvl1pPr>
               <a:defRPr sz="900">
                 <a:solidFill>
-                  <a:srgbClr val="6B6F76"/>
+                  <a:srgbClr val="6E7B88"/>
                 </a:solidFill>
               </a:defRPr>
             </a:lvl1pPr>
@@ -10224,35 +10177,36 @@
       </p:grpSpPr>
       <p:sp>
         <p:nvSpPr>
-          <p:cNvPr id="2" name="Text 3"/>
-          <p:cNvSpPr/>
-          <p:nvPr>
-            <p:ph idx="103" type="title" hasCustomPrompt="1"/>
-          </p:nvPr>
-        </p:nvSpPr>
-        <p:spPr>
-          <a:xfrm>
-            <a:off x="457200" y="347472"/>
-            <a:ext cx="8229600" cy="685800"/>
-          </a:xfrm>
-          <a:prstGeom prst="rect">
-            <a:avLst/>
-          </a:prstGeom>
-          <a:noFill/>
-          <a:ln/>
-        </p:spPr>
-        <p:txBody>
-          <a:bodyPr wrap="square" lIns="0" tIns="0" rIns="0" bIns="0" rtlCol="0" anchor="ctr"/>
-          <a:lstStyle/>
-          <a:p>
-            <a:pPr algn="l" indent="0" marL="0">
-              <a:buNone/>
-            </a:pPr>
-            <a:r>
-              <a:rPr lang="en-US" sz="2600" b="1" dirty="0">
-                <a:solidFill>
-                  <a:srgbClr val="0B0B0B"/>
-                </a:solidFill>
+          <p:cNvPr id="2" name="Text 0"/>
+          <p:cNvSpPr txBox="1"/>
+          <p:nvPr/>
+        </p:nvSpPr>
+        <p:spPr>
+          <a:xfrm>
+            <a:off x="457200" y="402336"/>
+            <a:ext cx="8229600" cy="749808"/>
+          </a:xfrm>
+          <a:prstGeom prst="rect">
+            <a:avLst/>
+          </a:prstGeom>
+          <a:noFill/>
+          <a:ln/>
+        </p:spPr>
+        <p:txBody>
+          <a:bodyPr wrap="square" lIns="0" tIns="0" rIns="0" bIns="0" rtlCol="0" anchor="t"/>
+          <a:lstStyle/>
+          <a:p>
+            <a:pPr algn="l" indent="0" marL="0">
+              <a:buNone/>
+            </a:pPr>
+            <a:r>
+              <a:rPr lang="en-US" altLang="en-US" sz="2600" b="1" dirty="0">
+                <a:solidFill>
+                  <a:schemeClr val="tx1"/>
+                </a:solidFill>
+                <a:latin typeface="Cambria" pitchFamily="34" charset="0"/>
+                <a:ea typeface="Cambria" pitchFamily="34" charset="-122"/>
+                <a:cs typeface="Cambria" pitchFamily="34" charset="-120"/>
               </a:rPr>
               <a:t>What actually happens without planning</a:t>
             </a:r>
@@ -10311,11 +10265,11 @@
             <a:avLst/>
           </a:prstGeom>
           <a:solidFill>
-            <a:srgbClr val="F4F1EA"/>
+            <a:srgbClr val="F4F1EB"/>
           </a:solidFill>
           <a:ln w="12700">
             <a:solidFill>
-              <a:srgbClr val="F4F1EA"/>
+              <a:srgbClr val="F4F1EB"/>
             </a:solidFill>
             <a:prstDash val="solid"/>
           </a:ln>
@@ -10416,11 +10370,11 @@
             <a:avLst/>
           </a:prstGeom>
           <a:solidFill>
-            <a:srgbClr val="F4F1EA"/>
+            <a:srgbClr val="F4F1EB"/>
           </a:solidFill>
           <a:ln w="12700">
             <a:solidFill>
-              <a:srgbClr val="F4F1EA"/>
+              <a:srgbClr val="F4F1EB"/>
             </a:solidFill>
             <a:prstDash val="solid"/>
           </a:ln>
@@ -10521,11 +10475,11 @@
             <a:avLst/>
           </a:prstGeom>
           <a:solidFill>
-            <a:srgbClr val="F4F1EA"/>
+            <a:srgbClr val="F4F1EB"/>
           </a:solidFill>
           <a:ln w="12700">
             <a:solidFill>
-              <a:srgbClr val="F4F1EA"/>
+              <a:srgbClr val="F4F1EB"/>
             </a:solidFill>
             <a:prstDash val="solid"/>
           </a:ln>
@@ -10626,11 +10580,11 @@
             <a:avLst/>
           </a:prstGeom>
           <a:solidFill>
-            <a:srgbClr val="F4F1EA"/>
+            <a:srgbClr val="F4F1EB"/>
           </a:solidFill>
           <a:ln w="12700">
             <a:solidFill>
-              <a:srgbClr val="F4F1EA"/>
+              <a:srgbClr val="F4F1EB"/>
             </a:solidFill>
             <a:prstDash val="solid"/>
           </a:ln>
@@ -10718,6 +10672,36 @@
       </p:sp>
       <p:sp>
         <p:nvSpPr>
+          <p:cNvPr id="16" name="Text 0"/>
+          <p:cNvSpPr/>
+          <p:nvPr>
+            <p:ph idx="101" type="title" hasCustomPrompt="1"/>
+          </p:nvPr>
+        </p:nvSpPr>
+        <p:spPr>
+          <a:xfrm>
+            <a:off x="457200" y="420624"/>
+            <a:ext cx="8229600" cy="731520"/>
+          </a:xfrm>
+          <a:prstGeom prst="rect">
+            <a:avLst/>
+          </a:prstGeom>
+          <a:noFill/>
+          <a:ln/>
+        </p:spPr>
+        <p:txBody>
+          <a:bodyPr wrap="square" lIns="0" tIns="0" rIns="0" bIns="0" rtlCol="0" anchor="t"/>
+          <a:lstStyle/>
+          <a:p>
+            <a:pPr algn="l" indent="0" marL="0">
+              <a:buNone/>
+            </a:pPr>
+            <a:endParaRPr lang="en-US" sz="2600" dirty="0"/>
+          </a:p>
+        </p:txBody>
+      </p:sp>
+      <p:sp>
+        <p:nvSpPr>
           <p:cNvPr id="25" name="Slide Number Placeholder 0"/>
           <p:cNvSpPr>
             <a:spLocks noGrp="1"/>
@@ -10746,7 +10730,7 @@
             <a:lvl1pPr>
               <a:defRPr sz="900">
                 <a:solidFill>
-                  <a:srgbClr val="6B6F76"/>
+                  <a:srgbClr val="6E7B88"/>
                 </a:solidFill>
               </a:defRPr>
             </a:lvl1pPr>
@@ -10833,17 +10817,17 @@
         </p:nvSpPr>
         <p:spPr>
           <a:xfrm>
-            <a:off x="457200" y="2834640"/>
-            <a:ext cx="7772400" cy="731520"/>
-          </a:xfrm>
-          <a:prstGeom prst="rect">
-            <a:avLst/>
-          </a:prstGeom>
-          <a:noFill/>
-          <a:ln/>
-        </p:spPr>
-        <p:txBody>
-          <a:bodyPr wrap="square" lIns="0" tIns="0" rIns="0" bIns="0" rtlCol="0" anchor="t"/>
+            <a:off x="457200" y="2743200"/>
+            <a:ext cx="7772400" cy="868680"/>
+          </a:xfrm>
+          <a:prstGeom prst="rect">
+            <a:avLst/>
+          </a:prstGeom>
+          <a:noFill/>
+          <a:ln/>
+        </p:spPr>
+        <p:txBody>
+          <a:bodyPr wrap="square" lIns="0" tIns="0" rIns="0" bIns="0" rtlCol="0" anchor="b"/>
           <a:lstStyle/>
           <a:p>
             <a:pPr algn="l" indent="0" marL="0">
@@ -10872,17 +10856,17 @@
         </p:nvSpPr>
         <p:spPr>
           <a:xfrm>
-            <a:off x="457200" y="3566160"/>
-            <a:ext cx="7772400" cy="548640"/>
-          </a:xfrm>
-          <a:prstGeom prst="rect">
-            <a:avLst/>
-          </a:prstGeom>
-          <a:noFill/>
-          <a:ln/>
-        </p:spPr>
-        <p:txBody>
-          <a:bodyPr wrap="square" lIns="0" tIns="0" rIns="0" bIns="0" rtlCol="0" anchor="ctr"/>
+            <a:off x="457200" y="3675888"/>
+            <a:ext cx="7772400" cy="502920"/>
+          </a:xfrm>
+          <a:prstGeom prst="rect">
+            <a:avLst/>
+          </a:prstGeom>
+          <a:noFill/>
+          <a:ln/>
+        </p:spPr>
+        <p:txBody>
+          <a:bodyPr wrap="square" lIns="0" tIns="0" rIns="0" bIns="0" rtlCol="0" anchor="t"/>
           <a:lstStyle/>
           <a:p>
             <a:pPr algn="l" indent="0" marL="0">
@@ -10930,7 +10914,7 @@
             <a:lvl1pPr>
               <a:defRPr sz="900">
                 <a:solidFill>
-                  <a:srgbClr val="D8C39A"/>
+                  <a:srgbClr val="D9B38C"/>
                 </a:solidFill>
               </a:defRPr>
             </a:lvl1pPr>
@@ -10972,35 +10956,36 @@
       </p:grpSpPr>
       <p:sp>
         <p:nvSpPr>
-          <p:cNvPr id="2" name="Text 3"/>
-          <p:cNvSpPr/>
-          <p:nvPr>
-            <p:ph idx="103" type="title" hasCustomPrompt="1"/>
-          </p:nvPr>
-        </p:nvSpPr>
-        <p:spPr>
-          <a:xfrm>
-            <a:off x="457200" y="347472"/>
-            <a:ext cx="8229600" cy="685800"/>
-          </a:xfrm>
-          <a:prstGeom prst="rect">
-            <a:avLst/>
-          </a:prstGeom>
-          <a:noFill/>
-          <a:ln/>
-        </p:spPr>
-        <p:txBody>
-          <a:bodyPr wrap="square" lIns="0" tIns="0" rIns="0" bIns="0" rtlCol="0" anchor="ctr"/>
-          <a:lstStyle/>
-          <a:p>
-            <a:pPr algn="l" indent="0" marL="0">
-              <a:buNone/>
-            </a:pPr>
-            <a:r>
-              <a:rPr lang="en-US" sz="2600" b="1" dirty="0">
-                <a:solidFill>
-                  <a:srgbClr val="0B0B0B"/>
-                </a:solidFill>
+          <p:cNvPr id="2" name="Text 0"/>
+          <p:cNvSpPr txBox="1"/>
+          <p:nvPr/>
+        </p:nvSpPr>
+        <p:spPr>
+          <a:xfrm>
+            <a:off x="457200" y="402336"/>
+            <a:ext cx="8229600" cy="749808"/>
+          </a:xfrm>
+          <a:prstGeom prst="rect">
+            <a:avLst/>
+          </a:prstGeom>
+          <a:noFill/>
+          <a:ln/>
+        </p:spPr>
+        <p:txBody>
+          <a:bodyPr wrap="square" lIns="0" tIns="0" rIns="0" bIns="0" rtlCol="0" anchor="t"/>
+          <a:lstStyle/>
+          <a:p>
+            <a:pPr algn="l" indent="0" marL="0">
+              <a:buNone/>
+            </a:pPr>
+            <a:r>
+              <a:rPr lang="en-US" altLang="en-US" sz="2600" b="1" dirty="0">
+                <a:solidFill>
+                  <a:schemeClr val="tx1"/>
+                </a:solidFill>
+                <a:latin typeface="Cambria" pitchFamily="34" charset="0"/>
+                <a:ea typeface="Cambria" pitchFamily="34" charset="-122"/>
+                <a:cs typeface="Cambria" pitchFamily="34" charset="-120"/>
               </a:rPr>
               <a:t>Where wills are registered in the UAE</a:t>
             </a:r>
@@ -11059,11 +11044,11 @@
             <a:avLst/>
           </a:prstGeom>
           <a:solidFill>
-            <a:srgbClr val="F4F1EA"/>
+            <a:srgbClr val="F4F1EB"/>
           </a:solidFill>
           <a:ln w="12700">
             <a:solidFill>
-              <a:srgbClr val="F4F1EA"/>
+              <a:srgbClr val="F4F1EB"/>
             </a:solidFill>
             <a:prstDash val="solid"/>
           </a:ln>
@@ -11164,11 +11149,11 @@
             <a:avLst/>
           </a:prstGeom>
           <a:solidFill>
-            <a:srgbClr val="F4F1EA"/>
+            <a:srgbClr val="F4F1EB"/>
           </a:solidFill>
           <a:ln w="12700">
             <a:solidFill>
-              <a:srgbClr val="F4F1EA"/>
+              <a:srgbClr val="F4F1EB"/>
             </a:solidFill>
             <a:prstDash val="solid"/>
           </a:ln>
@@ -11269,11 +11254,11 @@
             <a:avLst/>
           </a:prstGeom>
           <a:solidFill>
-            <a:srgbClr val="F4F1EA"/>
+            <a:srgbClr val="F4F1EB"/>
           </a:solidFill>
           <a:ln w="12700">
             <a:solidFill>
-              <a:srgbClr val="F4F1EA"/>
+              <a:srgbClr val="F4F1EB"/>
             </a:solidFill>
             <a:prstDash val="solid"/>
           </a:ln>
@@ -11374,11 +11359,11 @@
             <a:avLst/>
           </a:prstGeom>
           <a:solidFill>
-            <a:srgbClr val="F4F1EA"/>
+            <a:srgbClr val="F4F1EB"/>
           </a:solidFill>
           <a:ln w="12700">
             <a:solidFill>
-              <a:srgbClr val="F4F1EA"/>
+              <a:srgbClr val="F4F1EB"/>
             </a:solidFill>
             <a:prstDash val="solid"/>
           </a:ln>
@@ -11479,11 +11464,11 @@
             <a:avLst/>
           </a:prstGeom>
           <a:solidFill>
-            <a:srgbClr val="F4F1EA"/>
+            <a:srgbClr val="F4F1EB"/>
           </a:solidFill>
           <a:ln w="12700">
             <a:solidFill>
-              <a:srgbClr val="F4F1EA"/>
+              <a:srgbClr val="F4F1EB"/>
             </a:solidFill>
             <a:prstDash val="solid"/>
           </a:ln>
@@ -11584,11 +11569,11 @@
             <a:avLst/>
           </a:prstGeom>
           <a:solidFill>
-            <a:srgbClr val="0B0B0B"/>
+            <a:srgbClr val="0E2238"/>
           </a:solidFill>
           <a:ln w="12700">
             <a:solidFill>
-              <a:srgbClr val="0B0B0B"/>
+              <a:srgbClr val="0E2238"/>
             </a:solidFill>
             <a:prstDash val="solid"/>
           </a:ln>
@@ -11610,7 +11595,7 @@
           </a:prstGeom>
           <a:ln w="9525">
             <a:solidFill>
-              <a:srgbClr val="B08D57"/>
+              <a:srgbClr val="B5723B"/>
             </a:solidFill>
             <a:prstDash val="solid"/>
           </a:ln>
@@ -11688,6 +11673,36 @@
               <a:t>Nationality, religion, family status and where the assets sit decide the right route. That is why we always start with a discovery session, not with a will type.</a:t>
             </a:r>
             <a:endParaRPr lang="en-US" sz="1150" dirty="0"/>
+          </a:p>
+        </p:txBody>
+      </p:sp>
+      <p:sp>
+        <p:nvSpPr>
+          <p:cNvPr id="23" name="Text 0"/>
+          <p:cNvSpPr/>
+          <p:nvPr>
+            <p:ph idx="101" type="title" hasCustomPrompt="1"/>
+          </p:nvPr>
+        </p:nvSpPr>
+        <p:spPr>
+          <a:xfrm>
+            <a:off x="457200" y="420624"/>
+            <a:ext cx="8229600" cy="731520"/>
+          </a:xfrm>
+          <a:prstGeom prst="rect">
+            <a:avLst/>
+          </a:prstGeom>
+          <a:noFill/>
+          <a:ln/>
+        </p:spPr>
+        <p:txBody>
+          <a:bodyPr wrap="square" lIns="0" tIns="0" rIns="0" bIns="0" rtlCol="0" anchor="t"/>
+          <a:lstStyle/>
+          <a:p>
+            <a:pPr algn="l" indent="0" marL="0">
+              <a:buNone/>
+            </a:pPr>
+            <a:endParaRPr lang="en-US" sz="2600" dirty="0"/>
           </a:p>
         </p:txBody>
       </p:sp>
@@ -11721,7 +11736,7 @@
             <a:lvl1pPr>
               <a:defRPr sz="900">
                 <a:solidFill>
-                  <a:srgbClr val="6B6F76"/>
+                  <a:srgbClr val="6E7B88"/>
                 </a:solidFill>
               </a:defRPr>
             </a:lvl1pPr>
@@ -11763,35 +11778,36 @@
       </p:grpSpPr>
       <p:sp>
         <p:nvSpPr>
-          <p:cNvPr id="2" name="Text 3"/>
-          <p:cNvSpPr/>
-          <p:nvPr>
-            <p:ph idx="103" type="title" hasCustomPrompt="1"/>
-          </p:nvPr>
-        </p:nvSpPr>
-        <p:spPr>
-          <a:xfrm>
-            <a:off x="457200" y="347472"/>
-            <a:ext cx="8229600" cy="685800"/>
-          </a:xfrm>
-          <a:prstGeom prst="rect">
-            <a:avLst/>
-          </a:prstGeom>
-          <a:noFill/>
-          <a:ln/>
-        </p:spPr>
-        <p:txBody>
-          <a:bodyPr wrap="square" lIns="0" tIns="0" rIns="0" bIns="0" rtlCol="0" anchor="ctr"/>
-          <a:lstStyle/>
-          <a:p>
-            <a:pPr algn="l" indent="0" marL="0">
-              <a:buNone/>
-            </a:pPr>
-            <a:r>
-              <a:rPr lang="en-US" sz="2600" b="1" dirty="0">
-                <a:solidFill>
-                  <a:srgbClr val="0B0B0B"/>
-                </a:solidFill>
+          <p:cNvPr id="2" name="Text 0"/>
+          <p:cNvSpPr txBox="1"/>
+          <p:nvPr/>
+        </p:nvSpPr>
+        <p:spPr>
+          <a:xfrm>
+            <a:off x="457200" y="402336"/>
+            <a:ext cx="8229600" cy="749808"/>
+          </a:xfrm>
+          <a:prstGeom prst="rect">
+            <a:avLst/>
+          </a:prstGeom>
+          <a:noFill/>
+          <a:ln/>
+        </p:spPr>
+        <p:txBody>
+          <a:bodyPr wrap="square" lIns="0" tIns="0" rIns="0" bIns="0" rtlCol="0" anchor="t"/>
+          <a:lstStyle/>
+          <a:p>
+            <a:pPr algn="l" indent="0" marL="0">
+              <a:buNone/>
+            </a:pPr>
+            <a:r>
+              <a:rPr lang="en-US" altLang="en-US" sz="2600" b="1" dirty="0">
+                <a:solidFill>
+                  <a:schemeClr val="tx1"/>
+                </a:solidFill>
+                <a:latin typeface="Cambria" pitchFamily="34" charset="0"/>
+                <a:ea typeface="Cambria" pitchFamily="34" charset="-122"/>
+                <a:cs typeface="Cambria" pitchFamily="34" charset="-120"/>
               </a:rPr>
               <a:t>The main routes at a glance</a:t>
             </a:r>
@@ -11850,11 +11866,11 @@
             <a:avLst/>
           </a:prstGeom>
           <a:solidFill>
-            <a:srgbClr val="0B0B0B"/>
+            <a:srgbClr val="0E2238"/>
           </a:solidFill>
           <a:ln w="12700">
             <a:solidFill>
-              <a:srgbClr val="0B0B0B"/>
+              <a:srgbClr val="0E2238"/>
             </a:solidFill>
             <a:prstDash val="solid"/>
           </a:ln>
@@ -11911,11 +11927,11 @@
             <a:avLst/>
           </a:prstGeom>
           <a:solidFill>
-            <a:srgbClr val="F4F1EA"/>
+            <a:srgbClr val="F4F1EB"/>
           </a:solidFill>
           <a:ln w="12700">
             <a:solidFill>
-              <a:srgbClr val="F4F1EA"/>
+              <a:srgbClr val="F4F1EB"/>
             </a:solidFill>
             <a:prstDash val="solid"/>
           </a:ln>
@@ -12012,11 +12028,11 @@
             <a:avLst/>
           </a:prstGeom>
           <a:solidFill>
-            <a:srgbClr val="B08D57"/>
+            <a:srgbClr val="B5723B"/>
           </a:solidFill>
           <a:ln w="12700">
             <a:solidFill>
-              <a:srgbClr val="B08D57"/>
+              <a:srgbClr val="B5723B"/>
             </a:solidFill>
             <a:prstDash val="solid"/>
           </a:ln>
@@ -12073,11 +12089,11 @@
             <a:avLst/>
           </a:prstGeom>
           <a:solidFill>
-            <a:srgbClr val="F4F1EA"/>
+            <a:srgbClr val="F4F1EB"/>
           </a:solidFill>
           <a:ln w="12700">
             <a:solidFill>
-              <a:srgbClr val="F4F1EA"/>
+              <a:srgbClr val="F4F1EB"/>
             </a:solidFill>
             <a:prstDash val="solid"/>
           </a:ln>
@@ -12174,11 +12190,11 @@
             <a:avLst/>
           </a:prstGeom>
           <a:solidFill>
-            <a:srgbClr val="0B0B0B"/>
+            <a:srgbClr val="0E2238"/>
           </a:solidFill>
           <a:ln w="12700">
             <a:solidFill>
-              <a:srgbClr val="0B0B0B"/>
+              <a:srgbClr val="0E2238"/>
             </a:solidFill>
             <a:prstDash val="solid"/>
           </a:ln>
@@ -12235,11 +12251,11 @@
             <a:avLst/>
           </a:prstGeom>
           <a:solidFill>
-            <a:srgbClr val="F4F1EA"/>
+            <a:srgbClr val="F4F1EB"/>
           </a:solidFill>
           <a:ln w="12700">
             <a:solidFill>
-              <a:srgbClr val="F4F1EA"/>
+              <a:srgbClr val="F4F1EB"/>
             </a:solidFill>
             <a:prstDash val="solid"/>
           </a:ln>
@@ -12318,6 +12334,36 @@
               <a:t>An alternative route depending on assets and preference</a:t>
             </a:r>
             <a:endParaRPr lang="en-US" sz="1100" dirty="0"/>
+          </a:p>
+        </p:txBody>
+      </p:sp>
+      <p:sp>
+        <p:nvSpPr>
+          <p:cNvPr id="17" name="Text 0"/>
+          <p:cNvSpPr/>
+          <p:nvPr>
+            <p:ph idx="101" type="title" hasCustomPrompt="1"/>
+          </p:nvPr>
+        </p:nvSpPr>
+        <p:spPr>
+          <a:xfrm>
+            <a:off x="457200" y="420624"/>
+            <a:ext cx="8229600" cy="731520"/>
+          </a:xfrm>
+          <a:prstGeom prst="rect">
+            <a:avLst/>
+          </a:prstGeom>
+          <a:noFill/>
+          <a:ln/>
+        </p:spPr>
+        <p:txBody>
+          <a:bodyPr wrap="square" lIns="0" tIns="0" rIns="0" bIns="0" rtlCol="0" anchor="t"/>
+          <a:lstStyle/>
+          <a:p>
+            <a:pPr algn="l" indent="0" marL="0">
+              <a:buNone/>
+            </a:pPr>
+            <a:endParaRPr lang="en-US" sz="2600" dirty="0"/>
           </a:p>
         </p:txBody>
       </p:sp>
@@ -12351,7 +12397,7 @@
             <a:lvl1pPr>
               <a:defRPr sz="900">
                 <a:solidFill>
-                  <a:srgbClr val="6B6F76"/>
+                  <a:srgbClr val="6E7B88"/>
                 </a:solidFill>
               </a:defRPr>
             </a:lvl1pPr>
@@ -12438,17 +12484,17 @@
         </p:nvSpPr>
         <p:spPr>
           <a:xfrm>
-            <a:off x="457200" y="2834640"/>
-            <a:ext cx="7772400" cy="731520"/>
-          </a:xfrm>
-          <a:prstGeom prst="rect">
-            <a:avLst/>
-          </a:prstGeom>
-          <a:noFill/>
-          <a:ln/>
-        </p:spPr>
-        <p:txBody>
-          <a:bodyPr wrap="square" lIns="0" tIns="0" rIns="0" bIns="0" rtlCol="0" anchor="t"/>
+            <a:off x="457200" y="2743200"/>
+            <a:ext cx="7772400" cy="868680"/>
+          </a:xfrm>
+          <a:prstGeom prst="rect">
+            <a:avLst/>
+          </a:prstGeom>
+          <a:noFill/>
+          <a:ln/>
+        </p:spPr>
+        <p:txBody>
+          <a:bodyPr wrap="square" lIns="0" tIns="0" rIns="0" bIns="0" rtlCol="0" anchor="b"/>
           <a:lstStyle/>
           <a:p>
             <a:pPr algn="l" indent="0" marL="0">
@@ -12477,17 +12523,17 @@
         </p:nvSpPr>
         <p:spPr>
           <a:xfrm>
-            <a:off x="457200" y="3566160"/>
-            <a:ext cx="7772400" cy="548640"/>
-          </a:xfrm>
-          <a:prstGeom prst="rect">
-            <a:avLst/>
-          </a:prstGeom>
-          <a:noFill/>
-          <a:ln/>
-        </p:spPr>
-        <p:txBody>
-          <a:bodyPr wrap="square" lIns="0" tIns="0" rIns="0" bIns="0" rtlCol="0" anchor="ctr"/>
+            <a:off x="457200" y="3675888"/>
+            <a:ext cx="7772400" cy="502920"/>
+          </a:xfrm>
+          <a:prstGeom prst="rect">
+            <a:avLst/>
+          </a:prstGeom>
+          <a:noFill/>
+          <a:ln/>
+        </p:spPr>
+        <p:txBody>
+          <a:bodyPr wrap="square" lIns="0" tIns="0" rIns="0" bIns="0" rtlCol="0" anchor="t"/>
           <a:lstStyle/>
           <a:p>
             <a:pPr algn="l" indent="0" marL="0">
@@ -12535,7 +12581,7 @@
             <a:lvl1pPr>
               <a:defRPr sz="900">
                 <a:solidFill>
-                  <a:srgbClr val="D8C39A"/>
+                  <a:srgbClr val="D9B38C"/>
                 </a:solidFill>
               </a:defRPr>
             </a:lvl1pPr>
@@ -12559,47 +12605,47 @@
 </file>
 
 <file path=ppt/theme/theme1.xml><?xml version="1.0" encoding="utf-8"?>
-<a:theme xmlns:a="http://schemas.openxmlformats.org/drawingml/2006/main" name="RK Advocates">
+<a:theme xmlns:a="http://schemas.openxmlformats.org/drawingml/2006/main" name="Midnight Copper">
   <a:themeElements>
-    <a:clrScheme name="RK Advocates">
+    <a:clrScheme name="Midnight Copper">
       <a:dk1>
-        <a:srgbClr val="0B0B0B"/>
+        <a:srgbClr val="0E2238"/>
       </a:dk1>
       <a:lt1>
         <a:srgbClr val="FFFFFF"/>
       </a:lt1>
       <a:dk2>
-        <a:srgbClr val="2A2D33"/>
+        <a:srgbClr val="1F3A52"/>
       </a:dk2>
       <a:lt2>
-        <a:srgbClr val="F4F1EA"/>
+        <a:srgbClr val="F4F1EB"/>
       </a:lt2>
       <a:accent1>
-        <a:srgbClr val="B08D57"/>
+        <a:srgbClr val="B5723B"/>
       </a:accent1>
       <a:accent2>
-        <a:srgbClr val="D8C39A"/>
+        <a:srgbClr val="D9B38C"/>
       </a:accent2>
       <a:accent3>
-        <a:srgbClr val="6B6F76"/>
+        <a:srgbClr val="6E7B88"/>
       </a:accent3>
       <a:accent4>
-        <a:srgbClr val="8A6D3B"/>
+        <a:srgbClr val="8C5527"/>
       </a:accent4>
       <a:accent5>
-        <a:srgbClr val="E9E4DA"/>
+        <a:srgbClr val="E6E1D8"/>
       </a:accent5>
       <a:accent6>
-        <a:srgbClr val="15171B"/>
+        <a:srgbClr val="5B7A8C"/>
       </a:accent6>
       <a:hlink>
-        <a:srgbClr val="B08D57"/>
+        <a:srgbClr val="B5723B"/>
       </a:hlink>
       <a:folHlink>
-        <a:srgbClr val="8A6D3B"/>
+        <a:srgbClr val="8C5527"/>
       </a:folHlink>
     </a:clrScheme>
-    <a:fontScheme name="RK Advocates">
+    <a:fontScheme name="Midnight Copper">
       <a:majorFont>
         <a:latin typeface="Cambria"/>
         <a:ea typeface=""/>
